--- a/ws02/class/ws02_Lab1_RAG_VectorDB.pptx
+++ b/ws02/class/ws02_Lab1_RAG_VectorDB.pptx
@@ -9799,7 +9799,7 @@
                 <a:ea typeface="Arial" pitchFamily="34" charset="-122"/>
                 <a:cs typeface="Arial" pitchFamily="34" charset="-120"/>
               </a:rPr>
-              <a:t>Gemini Grounding</a:t>
+              <a:t>DeepSeek Grounding</a:t>
             </a:r>
             <a:endParaRPr lang="en-US" sz="900" dirty="0"/>
           </a:p>

--- a/ws02/class/ws02_Lab1_RAG_VectorDB.pptx
+++ b/ws02/class/ws02_Lab1_RAG_VectorDB.pptx
@@ -27067,6 +27067,14 @@
 <file path=ppt/slides/slide5.xml><?xml version="1.0" encoding="utf-8"?>
 <p:sld xmlns:a="http://schemas.openxmlformats.org/drawingml/2006/main" xmlns:r="http://schemas.openxmlformats.org/officeDocument/2006/relationships" xmlns:p="http://schemas.openxmlformats.org/presentationml/2006/main">
   <p:cSld>
+    <p:bg>
+      <p:bgPr>
+        <a:solidFill>
+          <a:srgbClr val="FFFFFF"/>
+        </a:solidFill>
+        <a:effectLst/>
+      </p:bgPr>
+    </p:bg>
     <p:spTree>
       <p:nvGrpSpPr>
         <p:cNvPr id="1" name=""/>
@@ -27083,1775 +27091,1158 @@
       </p:grpSpPr>
       <p:sp>
         <p:nvSpPr>
-          <p:cNvPr id="22" name="Shape 20"/>
-          <p:cNvSpPr/>
-          <p:nvPr/>
-        </p:nvSpPr>
-        <p:spPr>
-          <a:xfrm>
-            <a:off x="6035040" y="594359"/>
-            <a:ext cx="5852160" cy="5001371"/>
+          <p:cNvPr id="2" name="TextBox 1"/>
+          <p:cNvSpPr txBox="1"/>
+          <p:nvPr/>
+        </p:nvSpPr>
+        <p:spPr>
+          <a:xfrm>
+            <a:off x="457200" y="274320"/>
+            <a:ext cx="11247120" cy="548640"/>
+          </a:xfrm>
+          <a:prstGeom prst="rect">
+            <a:avLst/>
+          </a:prstGeom>
+          <a:noFill/>
+        </p:spPr>
+        <p:txBody>
+          <a:bodyPr wrap="square" lIns="45720" rIns="45720" tIns="18288" bIns="18288">
+            <a:spAutoFit/>
+          </a:bodyPr>
+          <a:lstStyle/>
+          <a:p>
+            <a:pPr algn="l"/>
+            <a:r>
+              <a:rPr sz="2200" b="1">
+                <a:solidFill>
+                  <a:srgbClr val="111848"/>
+                </a:solidFill>
+                <a:latin typeface="맑은 고딕"/>
+              </a:rPr>
+              <a:t>⚙️  Step 0 — 환경 설정 (DeepSeek + OpenAI 호환 클라이언트)</a:t>
+            </a:r>
+          </a:p>
+        </p:txBody>
+      </p:sp>
+      <p:sp>
+        <p:nvSpPr>
+          <p:cNvPr id="3" name="Rectangle 2"/>
+          <p:cNvSpPr/>
+          <p:nvPr/>
+        </p:nvSpPr>
+        <p:spPr>
+          <a:xfrm>
+            <a:off x="457200" y="1051560"/>
+            <a:ext cx="5212080" cy="457200"/>
           </a:xfrm>
           <a:prstGeom prst="rect">
             <a:avLst/>
           </a:prstGeom>
           <a:solidFill>
-            <a:srgbClr val="0D1117"/>
+            <a:srgbClr val="334175"/>
           </a:solidFill>
-          <a:ln/>
-          <a:effectLst>
-            <a:outerShdw blurRad="63500" dist="25400" dir="8100000" algn="bl" rotWithShape="0">
-              <a:srgbClr val="000000">
-                <a:alpha val="10000"/>
-              </a:srgbClr>
-            </a:outerShdw>
-          </a:effectLst>
-        </p:spPr>
-        <p:txBody>
-          <a:bodyPr/>
-          <a:lstStyle/>
-          <a:p>
-            <a:endParaRPr lang="ko-KR" altLang="en-US"/>
-          </a:p>
-        </p:txBody>
-      </p:sp>
-      <p:sp>
-        <p:nvSpPr>
-          <p:cNvPr id="2" name="Text 0"/>
-          <p:cNvSpPr/>
-          <p:nvPr/>
-        </p:nvSpPr>
-        <p:spPr>
-          <a:xfrm>
-            <a:off x="365760" y="228600"/>
-            <a:ext cx="10972800" cy="365760"/>
-          </a:xfrm>
-          <a:prstGeom prst="rect">
-            <a:avLst/>
-          </a:prstGeom>
-          <a:noFill/>
-          <a:ln/>
-        </p:spPr>
-        <p:txBody>
-          <a:bodyPr wrap="square" lIns="0" tIns="0" rIns="0" bIns="0" rtlCol="0" anchor="ctr"/>
-          <a:lstStyle/>
-          <a:p>
-            <a:r>
-              <a:rPr lang="en-US" sz="1800" b="1" dirty="0">
+          <a:ln w="9525">
+            <a:solidFill>
+              <a:srgbClr val="334175"/>
+            </a:solidFill>
+          </a:ln>
+        </p:spPr>
+        <p:style>
+          <a:lnRef idx="1">
+            <a:schemeClr val="accent1"/>
+          </a:lnRef>
+          <a:fillRef idx="3">
+            <a:schemeClr val="accent1"/>
+          </a:fillRef>
+          <a:effectRef idx="2">
+            <a:schemeClr val="accent1"/>
+          </a:effectRef>
+          <a:fontRef idx="minor">
+            <a:schemeClr val="lt1"/>
+          </a:fontRef>
+        </p:style>
+        <p:txBody>
+          <a:bodyPr rtlCol="0" anchor="ctr"/>
+          <a:lstStyle/>
+          <a:p>
+            <a:pPr algn="ctr"/>
+          </a:p>
+        </p:txBody>
+      </p:sp>
+      <p:sp>
+        <p:nvSpPr>
+          <p:cNvPr id="4" name="TextBox 3"/>
+          <p:cNvSpPr txBox="1"/>
+          <p:nvPr/>
+        </p:nvSpPr>
+        <p:spPr>
+          <a:xfrm>
+            <a:off x="594360" y="1143000"/>
+            <a:ext cx="4937760" cy="320040"/>
+          </a:xfrm>
+          <a:prstGeom prst="rect">
+            <a:avLst/>
+          </a:prstGeom>
+          <a:noFill/>
+        </p:spPr>
+        <p:txBody>
+          <a:bodyPr wrap="square" lIns="45720" rIns="45720" tIns="18288" bIns="18288">
+            <a:spAutoFit/>
+          </a:bodyPr>
+          <a:lstStyle/>
+          <a:p>
+            <a:pPr algn="l"/>
+            <a:r>
+              <a:rPr sz="1300" b="1">
+                <a:solidFill>
+                  <a:srgbClr val="FFFFFF"/>
+                </a:solidFill>
+                <a:latin typeface="맑은 고딕"/>
+              </a:rPr>
+              <a:t>①  API 키 설정</a:t>
+            </a:r>
+          </a:p>
+        </p:txBody>
+      </p:sp>
+      <p:sp>
+        <p:nvSpPr>
+          <p:cNvPr id="5" name="Rectangle 4"/>
+          <p:cNvSpPr/>
+          <p:nvPr/>
+        </p:nvSpPr>
+        <p:spPr>
+          <a:xfrm>
+            <a:off x="457200" y="1508760"/>
+            <a:ext cx="5212080" cy="914400"/>
+          </a:xfrm>
+          <a:prstGeom prst="rect">
+            <a:avLst/>
+          </a:prstGeom>
+          <a:solidFill>
+            <a:srgbClr val="E8EAF2"/>
+          </a:solidFill>
+          <a:ln w="9525">
+            <a:solidFill>
+              <a:srgbClr val="E8EAF2"/>
+            </a:solidFill>
+          </a:ln>
+        </p:spPr>
+        <p:style>
+          <a:lnRef idx="1">
+            <a:schemeClr val="accent1"/>
+          </a:lnRef>
+          <a:fillRef idx="3">
+            <a:schemeClr val="accent1"/>
+          </a:fillRef>
+          <a:effectRef idx="2">
+            <a:schemeClr val="accent1"/>
+          </a:effectRef>
+          <a:fontRef idx="minor">
+            <a:schemeClr val="lt1"/>
+          </a:fontRef>
+        </p:style>
+        <p:txBody>
+          <a:bodyPr rtlCol="0" anchor="ctr"/>
+          <a:lstStyle/>
+          <a:p>
+            <a:pPr algn="ctr"/>
+          </a:p>
+        </p:txBody>
+      </p:sp>
+      <p:sp>
+        <p:nvSpPr>
+          <p:cNvPr id="6" name="TextBox 5"/>
+          <p:cNvSpPr txBox="1"/>
+          <p:nvPr/>
+        </p:nvSpPr>
+        <p:spPr>
+          <a:xfrm>
+            <a:off x="640080" y="1600200"/>
+            <a:ext cx="4937760" cy="274320"/>
+          </a:xfrm>
+          <a:prstGeom prst="rect">
+            <a:avLst/>
+          </a:prstGeom>
+          <a:noFill/>
+        </p:spPr>
+        <p:txBody>
+          <a:bodyPr wrap="square" lIns="45720" rIns="45720" tIns="18288" bIns="18288">
+            <a:spAutoFit/>
+          </a:bodyPr>
+          <a:lstStyle/>
+          <a:p>
+            <a:pPr algn="l"/>
+            <a:r>
+              <a:rPr sz="1100" b="0">
                 <a:solidFill>
                   <a:srgbClr val="111848"/>
                 </a:solidFill>
-                <a:latin typeface="Arial" pitchFamily="34" charset="0"/>
-                <a:ea typeface="Arial" pitchFamily="34" charset="-122"/>
-                <a:cs typeface="Arial" pitchFamily="34" charset="-120"/>
-              </a:rPr>
-              <a:t>⚙️  Step 0 —</a:t>
-            </a:r>
-            <a:r>
-              <a:rPr lang="en-US" sz="1800" b="1" dirty="0" err="1">
+                <a:latin typeface="맑은 고딕"/>
+              </a:rPr>
+              <a:t>Colab: 왼쪽 🔑 아이콘 → Secrets</a:t>
+            </a:r>
+          </a:p>
+        </p:txBody>
+      </p:sp>
+      <p:sp>
+        <p:nvSpPr>
+          <p:cNvPr id="7" name="TextBox 6"/>
+          <p:cNvSpPr txBox="1"/>
+          <p:nvPr/>
+        </p:nvSpPr>
+        <p:spPr>
+          <a:xfrm>
+            <a:off x="640080" y="1847088"/>
+            <a:ext cx="4937760" cy="274320"/>
+          </a:xfrm>
+          <a:prstGeom prst="rect">
+            <a:avLst/>
+          </a:prstGeom>
+          <a:noFill/>
+        </p:spPr>
+        <p:txBody>
+          <a:bodyPr wrap="square" lIns="45720" rIns="45720" tIns="18288" bIns="18288">
+            <a:spAutoFit/>
+          </a:bodyPr>
+          <a:lstStyle/>
+          <a:p>
+            <a:pPr algn="l"/>
+            <a:r>
+              <a:rPr sz="1100" b="0">
                 <a:solidFill>
                   <a:srgbClr val="111848"/>
                 </a:solidFill>
-                <a:latin typeface="Arial" pitchFamily="34" charset="0"/>
-                <a:ea typeface="Arial" pitchFamily="34" charset="-122"/>
-                <a:cs typeface="Arial" pitchFamily="34" charset="-120"/>
-              </a:rPr>
-              <a:t>환경</a:t>
-            </a:r>
-            <a:r>
-              <a:rPr lang="en-US" sz="1800" b="1" dirty="0">
+                <a:latin typeface="맑은 고딕"/>
+              </a:rPr>
+              <a:t>→ DEEPSEEK_API_KEY 추가</a:t>
+            </a:r>
+          </a:p>
+        </p:txBody>
+      </p:sp>
+      <p:sp>
+        <p:nvSpPr>
+          <p:cNvPr id="8" name="TextBox 7"/>
+          <p:cNvSpPr txBox="1"/>
+          <p:nvPr/>
+        </p:nvSpPr>
+        <p:spPr>
+          <a:xfrm>
+            <a:off x="640080" y="2093976"/>
+            <a:ext cx="4937760" cy="274320"/>
+          </a:xfrm>
+          <a:prstGeom prst="rect">
+            <a:avLst/>
+          </a:prstGeom>
+          <a:noFill/>
+        </p:spPr>
+        <p:txBody>
+          <a:bodyPr wrap="square" lIns="45720" rIns="45720" tIns="18288" bIns="18288">
+            <a:spAutoFit/>
+          </a:bodyPr>
+          <a:lstStyle/>
+          <a:p>
+            <a:pPr algn="l"/>
+            <a:r>
+              <a:rPr sz="1100" b="0">
                 <a:solidFill>
                   <a:srgbClr val="111848"/>
                 </a:solidFill>
-                <a:latin typeface="Arial" pitchFamily="34" charset="0"/>
-                <a:ea typeface="Arial" pitchFamily="34" charset="-122"/>
-                <a:cs typeface="Arial" pitchFamily="34" charset="-120"/>
+                <a:latin typeface="맑은 고딕"/>
+              </a:rPr>
+              <a:t>키 없으면 진행 불가</a:t>
+            </a:r>
+          </a:p>
+        </p:txBody>
+      </p:sp>
+      <p:sp>
+        <p:nvSpPr>
+          <p:cNvPr id="9" name="Rectangle 8"/>
+          <p:cNvSpPr/>
+          <p:nvPr/>
+        </p:nvSpPr>
+        <p:spPr>
+          <a:xfrm>
+            <a:off x="457200" y="2514600"/>
+            <a:ext cx="5212080" cy="457200"/>
+          </a:xfrm>
+          <a:prstGeom prst="rect">
+            <a:avLst/>
+          </a:prstGeom>
+          <a:solidFill>
+            <a:srgbClr val="334175"/>
+          </a:solidFill>
+          <a:ln w="9525">
+            <a:solidFill>
+              <a:srgbClr val="334175"/>
+            </a:solidFill>
+          </a:ln>
+        </p:spPr>
+        <p:style>
+          <a:lnRef idx="1">
+            <a:schemeClr val="accent1"/>
+          </a:lnRef>
+          <a:fillRef idx="3">
+            <a:schemeClr val="accent1"/>
+          </a:fillRef>
+          <a:effectRef idx="2">
+            <a:schemeClr val="accent1"/>
+          </a:effectRef>
+          <a:fontRef idx="minor">
+            <a:schemeClr val="lt1"/>
+          </a:fontRef>
+        </p:style>
+        <p:txBody>
+          <a:bodyPr rtlCol="0" anchor="ctr"/>
+          <a:lstStyle/>
+          <a:p>
+            <a:pPr algn="ctr"/>
+          </a:p>
+        </p:txBody>
+      </p:sp>
+      <p:sp>
+        <p:nvSpPr>
+          <p:cNvPr id="10" name="TextBox 9"/>
+          <p:cNvSpPr txBox="1"/>
+          <p:nvPr/>
+        </p:nvSpPr>
+        <p:spPr>
+          <a:xfrm>
+            <a:off x="594360" y="2606040"/>
+            <a:ext cx="4937760" cy="320040"/>
+          </a:xfrm>
+          <a:prstGeom prst="rect">
+            <a:avLst/>
+          </a:prstGeom>
+          <a:noFill/>
+        </p:spPr>
+        <p:txBody>
+          <a:bodyPr wrap="square" lIns="45720" rIns="45720" tIns="18288" bIns="18288">
+            <a:spAutoFit/>
+          </a:bodyPr>
+          <a:lstStyle/>
+          <a:p>
+            <a:pPr algn="l"/>
+            <a:r>
+              <a:rPr sz="1300" b="1">
+                <a:solidFill>
+                  <a:srgbClr val="FFFFFF"/>
+                </a:solidFill>
+                <a:latin typeface="맑은 고딕"/>
+              </a:rPr>
+              <a:t>②  패키지 설치 (최초 1회)</a:t>
+            </a:r>
+          </a:p>
+        </p:txBody>
+      </p:sp>
+      <p:sp>
+        <p:nvSpPr>
+          <p:cNvPr id="11" name="Rectangle 10"/>
+          <p:cNvSpPr/>
+          <p:nvPr/>
+        </p:nvSpPr>
+        <p:spPr>
+          <a:xfrm>
+            <a:off x="457200" y="2971800"/>
+            <a:ext cx="5212080" cy="914400"/>
+          </a:xfrm>
+          <a:prstGeom prst="rect">
+            <a:avLst/>
+          </a:prstGeom>
+          <a:solidFill>
+            <a:srgbClr val="E8EAF2"/>
+          </a:solidFill>
+          <a:ln w="9525">
+            <a:solidFill>
+              <a:srgbClr val="E8EAF2"/>
+            </a:solidFill>
+          </a:ln>
+        </p:spPr>
+        <p:style>
+          <a:lnRef idx="1">
+            <a:schemeClr val="accent1"/>
+          </a:lnRef>
+          <a:fillRef idx="3">
+            <a:schemeClr val="accent1"/>
+          </a:fillRef>
+          <a:effectRef idx="2">
+            <a:schemeClr val="accent1"/>
+          </a:effectRef>
+          <a:fontRef idx="minor">
+            <a:schemeClr val="lt1"/>
+          </a:fontRef>
+        </p:style>
+        <p:txBody>
+          <a:bodyPr rtlCol="0" anchor="ctr"/>
+          <a:lstStyle/>
+          <a:p>
+            <a:pPr algn="ctr"/>
+          </a:p>
+        </p:txBody>
+      </p:sp>
+      <p:sp>
+        <p:nvSpPr>
+          <p:cNvPr id="12" name="TextBox 11"/>
+          <p:cNvSpPr txBox="1"/>
+          <p:nvPr/>
+        </p:nvSpPr>
+        <p:spPr>
+          <a:xfrm>
+            <a:off x="640080" y="3063240"/>
+            <a:ext cx="4937760" cy="274320"/>
+          </a:xfrm>
+          <a:prstGeom prst="rect">
+            <a:avLst/>
+          </a:prstGeom>
+          <a:noFill/>
+        </p:spPr>
+        <p:txBody>
+          <a:bodyPr wrap="square" lIns="45720" rIns="45720" tIns="18288" bIns="18288">
+            <a:spAutoFit/>
+          </a:bodyPr>
+          <a:lstStyle/>
+          <a:p>
+            <a:pPr algn="l"/>
+            <a:r>
+              <a:rPr sz="1100" b="0">
+                <a:solidFill>
+                  <a:srgbClr val="111848"/>
+                </a:solidFill>
+                <a:latin typeface="맑은 고딕"/>
+              </a:rPr>
+              <a:t>!pip install -q openai</a:t>
+            </a:r>
+          </a:p>
+        </p:txBody>
+      </p:sp>
+      <p:sp>
+        <p:nvSpPr>
+          <p:cNvPr id="13" name="TextBox 12"/>
+          <p:cNvSpPr txBox="1"/>
+          <p:nvPr/>
+        </p:nvSpPr>
+        <p:spPr>
+          <a:xfrm>
+            <a:off x="640080" y="3310128"/>
+            <a:ext cx="4937760" cy="274320"/>
+          </a:xfrm>
+          <a:prstGeom prst="rect">
+            <a:avLst/>
+          </a:prstGeom>
+          <a:noFill/>
+        </p:spPr>
+        <p:txBody>
+          <a:bodyPr wrap="square" lIns="45720" rIns="45720" tIns="18288" bIns="18288">
+            <a:spAutoFit/>
+          </a:bodyPr>
+          <a:lstStyle/>
+          <a:p>
+            <a:pPr algn="l"/>
+            <a:r>
+              <a:rPr sz="1100" b="0">
+                <a:solidFill>
+                  <a:srgbClr val="111848"/>
+                </a:solidFill>
+                <a:latin typeface="맑은 고딕"/>
+              </a:rPr>
+              <a:t>Colab 런타임 재시작 불필요</a:t>
+            </a:r>
+          </a:p>
+        </p:txBody>
+      </p:sp>
+      <p:sp>
+        <p:nvSpPr>
+          <p:cNvPr id="14" name="Rectangle 13"/>
+          <p:cNvSpPr/>
+          <p:nvPr/>
+        </p:nvSpPr>
+        <p:spPr>
+          <a:xfrm>
+            <a:off x="457200" y="3977640"/>
+            <a:ext cx="5212080" cy="457200"/>
+          </a:xfrm>
+          <a:prstGeom prst="rect">
+            <a:avLst/>
+          </a:prstGeom>
+          <a:solidFill>
+            <a:srgbClr val="334175"/>
+          </a:solidFill>
+          <a:ln w="9525">
+            <a:solidFill>
+              <a:srgbClr val="334175"/>
+            </a:solidFill>
+          </a:ln>
+        </p:spPr>
+        <p:style>
+          <a:lnRef idx="1">
+            <a:schemeClr val="accent1"/>
+          </a:lnRef>
+          <a:fillRef idx="3">
+            <a:schemeClr val="accent1"/>
+          </a:fillRef>
+          <a:effectRef idx="2">
+            <a:schemeClr val="accent1"/>
+          </a:effectRef>
+          <a:fontRef idx="minor">
+            <a:schemeClr val="lt1"/>
+          </a:fontRef>
+        </p:style>
+        <p:txBody>
+          <a:bodyPr rtlCol="0" anchor="ctr"/>
+          <a:lstStyle/>
+          <a:p>
+            <a:pPr algn="ctr"/>
+          </a:p>
+        </p:txBody>
+      </p:sp>
+      <p:sp>
+        <p:nvSpPr>
+          <p:cNvPr id="15" name="TextBox 14"/>
+          <p:cNvSpPr txBox="1"/>
+          <p:nvPr/>
+        </p:nvSpPr>
+        <p:spPr>
+          <a:xfrm>
+            <a:off x="594360" y="4069080"/>
+            <a:ext cx="4937760" cy="320040"/>
+          </a:xfrm>
+          <a:prstGeom prst="rect">
+            <a:avLst/>
+          </a:prstGeom>
+          <a:noFill/>
+        </p:spPr>
+        <p:txBody>
+          <a:bodyPr wrap="square" lIns="45720" rIns="45720" tIns="18288" bIns="18288">
+            <a:spAutoFit/>
+          </a:bodyPr>
+          <a:lstStyle/>
+          <a:p>
+            <a:pPr algn="l"/>
+            <a:r>
+              <a:rPr sz="1300" b="1">
+                <a:solidFill>
+                  <a:srgbClr val="FFFFFF"/>
+                </a:solidFill>
+                <a:latin typeface="맑은 고딕"/>
+              </a:rPr>
+              <a:t>③  모델 선택</a:t>
+            </a:r>
+          </a:p>
+        </p:txBody>
+      </p:sp>
+      <p:sp>
+        <p:nvSpPr>
+          <p:cNvPr id="16" name="Rectangle 15"/>
+          <p:cNvSpPr/>
+          <p:nvPr/>
+        </p:nvSpPr>
+        <p:spPr>
+          <a:xfrm>
+            <a:off x="457200" y="4434840"/>
+            <a:ext cx="5212080" cy="914400"/>
+          </a:xfrm>
+          <a:prstGeom prst="rect">
+            <a:avLst/>
+          </a:prstGeom>
+          <a:solidFill>
+            <a:srgbClr val="E8EAF2"/>
+          </a:solidFill>
+          <a:ln w="9525">
+            <a:solidFill>
+              <a:srgbClr val="E8EAF2"/>
+            </a:solidFill>
+          </a:ln>
+        </p:spPr>
+        <p:style>
+          <a:lnRef idx="1">
+            <a:schemeClr val="accent1"/>
+          </a:lnRef>
+          <a:fillRef idx="3">
+            <a:schemeClr val="accent1"/>
+          </a:fillRef>
+          <a:effectRef idx="2">
+            <a:schemeClr val="accent1"/>
+          </a:effectRef>
+          <a:fontRef idx="minor">
+            <a:schemeClr val="lt1"/>
+          </a:fontRef>
+        </p:style>
+        <p:txBody>
+          <a:bodyPr rtlCol="0" anchor="ctr"/>
+          <a:lstStyle/>
+          <a:p>
+            <a:pPr algn="ctr"/>
+          </a:p>
+        </p:txBody>
+      </p:sp>
+      <p:sp>
+        <p:nvSpPr>
+          <p:cNvPr id="17" name="TextBox 16"/>
+          <p:cNvSpPr txBox="1"/>
+          <p:nvPr/>
+        </p:nvSpPr>
+        <p:spPr>
+          <a:xfrm>
+            <a:off x="640080" y="4526280"/>
+            <a:ext cx="4937760" cy="274320"/>
+          </a:xfrm>
+          <a:prstGeom prst="rect">
+            <a:avLst/>
+          </a:prstGeom>
+          <a:noFill/>
+        </p:spPr>
+        <p:txBody>
+          <a:bodyPr wrap="square" lIns="45720" rIns="45720" tIns="18288" bIns="18288">
+            <a:spAutoFit/>
+          </a:bodyPr>
+          <a:lstStyle/>
+          <a:p>
+            <a:pPr algn="l"/>
+            <a:r>
+              <a:rPr sz="1100" b="0">
+                <a:solidFill>
+                  <a:srgbClr val="111848"/>
+                </a:solidFill>
+                <a:latin typeface="맑은 고딕"/>
+              </a:rPr>
+              <a:t>MODEL = "deepseek-chat"</a:t>
+            </a:r>
+          </a:p>
+        </p:txBody>
+      </p:sp>
+      <p:sp>
+        <p:nvSpPr>
+          <p:cNvPr id="18" name="TextBox 17"/>
+          <p:cNvSpPr txBox="1"/>
+          <p:nvPr/>
+        </p:nvSpPr>
+        <p:spPr>
+          <a:xfrm>
+            <a:off x="640080" y="4773168"/>
+            <a:ext cx="4937760" cy="274320"/>
+          </a:xfrm>
+          <a:prstGeom prst="rect">
+            <a:avLst/>
+          </a:prstGeom>
+          <a:noFill/>
+        </p:spPr>
+        <p:txBody>
+          <a:bodyPr wrap="square" lIns="45720" rIns="45720" tIns="18288" bIns="18288">
+            <a:spAutoFit/>
+          </a:bodyPr>
+          <a:lstStyle/>
+          <a:p>
+            <a:pPr algn="l"/>
+            <a:r>
+              <a:rPr sz="1100" b="0">
+                <a:solidFill>
+                  <a:srgbClr val="111848"/>
+                </a:solidFill>
+                <a:latin typeface="맑은 고딕"/>
+              </a:rPr>
+              <a:t>OpenAI 호환 client</a:t>
+            </a:r>
+          </a:p>
+        </p:txBody>
+      </p:sp>
+      <p:sp>
+        <p:nvSpPr>
+          <p:cNvPr id="19" name="TextBox 18"/>
+          <p:cNvSpPr txBox="1"/>
+          <p:nvPr/>
+        </p:nvSpPr>
+        <p:spPr>
+          <a:xfrm>
+            <a:off x="640080" y="5020056"/>
+            <a:ext cx="4937760" cy="274320"/>
+          </a:xfrm>
+          <a:prstGeom prst="rect">
+            <a:avLst/>
+          </a:prstGeom>
+          <a:noFill/>
+        </p:spPr>
+        <p:txBody>
+          <a:bodyPr wrap="square" lIns="45720" rIns="45720" tIns="18288" bIns="18288">
+            <a:spAutoFit/>
+          </a:bodyPr>
+          <a:lstStyle/>
+          <a:p>
+            <a:pPr algn="l"/>
+            <a:r>
+              <a:rPr sz="1100" b="0">
+                <a:solidFill>
+                  <a:srgbClr val="111848"/>
+                </a:solidFill>
+                <a:latin typeface="맑은 고딕"/>
+              </a:rPr>
+              <a:t>아래 코드를 Cell 2~4 순서대로 실행</a:t>
+            </a:r>
+          </a:p>
+        </p:txBody>
+      </p:sp>
+      <p:sp>
+        <p:nvSpPr>
+          <p:cNvPr id="20" name="Rectangle 19"/>
+          <p:cNvSpPr/>
+          <p:nvPr/>
+        </p:nvSpPr>
+        <p:spPr>
+          <a:xfrm>
+            <a:off x="457200" y="5669280"/>
+            <a:ext cx="5212080" cy="502920"/>
+          </a:xfrm>
+          <a:prstGeom prst="rect">
+            <a:avLst/>
+          </a:prstGeom>
+          <a:solidFill>
+            <a:srgbClr val="FEF9EE"/>
+          </a:solidFill>
+          <a:ln w="9525">
+            <a:solidFill>
+              <a:srgbClr val="E5D5B0"/>
+            </a:solidFill>
+          </a:ln>
+        </p:spPr>
+        <p:style>
+          <a:lnRef idx="1">
+            <a:schemeClr val="accent1"/>
+          </a:lnRef>
+          <a:fillRef idx="3">
+            <a:schemeClr val="accent1"/>
+          </a:fillRef>
+          <a:effectRef idx="2">
+            <a:schemeClr val="accent1"/>
+          </a:effectRef>
+          <a:fontRef idx="minor">
+            <a:schemeClr val="lt1"/>
+          </a:fontRef>
+        </p:style>
+        <p:txBody>
+          <a:bodyPr rtlCol="0" anchor="ctr"/>
+          <a:lstStyle/>
+          <a:p>
+            <a:pPr algn="ctr"/>
+          </a:p>
+        </p:txBody>
+      </p:sp>
+      <p:sp>
+        <p:nvSpPr>
+          <p:cNvPr id="21" name="TextBox 20"/>
+          <p:cNvSpPr txBox="1"/>
+          <p:nvPr/>
+        </p:nvSpPr>
+        <p:spPr>
+          <a:xfrm>
+            <a:off x="594360" y="5760720"/>
+            <a:ext cx="4937760" cy="365760"/>
+          </a:xfrm>
+          <a:prstGeom prst="rect">
+            <a:avLst/>
+          </a:prstGeom>
+          <a:noFill/>
+        </p:spPr>
+        <p:txBody>
+          <a:bodyPr wrap="square" lIns="45720" rIns="45720" tIns="18288" bIns="18288">
+            <a:spAutoFit/>
+          </a:bodyPr>
+          <a:lstStyle/>
+          <a:p>
+            <a:pPr algn="l"/>
+            <a:r>
+              <a:rPr sz="1100" b="0">
+                <a:solidFill>
+                  <a:srgbClr val="92400E"/>
+                </a:solidFill>
+                <a:latin typeface="맑은 고딕"/>
+              </a:rPr>
+              <a:t>💡  셀을 위에서 아래로 순서대로 실행 — 한 셀씩 Shift+Enter</a:t>
+            </a:r>
+          </a:p>
+        </p:txBody>
+      </p:sp>
+      <p:sp>
+        <p:nvSpPr>
+          <p:cNvPr id="22" name="Rectangle 21"/>
+          <p:cNvSpPr/>
+          <p:nvPr/>
+        </p:nvSpPr>
+        <p:spPr>
+          <a:xfrm>
+            <a:off x="5943600" y="1051560"/>
+            <a:ext cx="5852160" cy="5486400"/>
+          </a:xfrm>
+          <a:prstGeom prst="rect">
+            <a:avLst/>
+          </a:prstGeom>
+          <a:solidFill>
+            <a:srgbClr val="0A1033"/>
+          </a:solidFill>
+          <a:ln w="9525">
+            <a:solidFill>
+              <a:srgbClr val="334175"/>
+            </a:solidFill>
+          </a:ln>
+        </p:spPr>
+        <p:style>
+          <a:lnRef idx="1">
+            <a:schemeClr val="accent1"/>
+          </a:lnRef>
+          <a:fillRef idx="3">
+            <a:schemeClr val="accent1"/>
+          </a:fillRef>
+          <a:effectRef idx="2">
+            <a:schemeClr val="accent1"/>
+          </a:effectRef>
+          <a:fontRef idx="minor">
+            <a:schemeClr val="lt1"/>
+          </a:fontRef>
+        </p:style>
+        <p:txBody>
+          <a:bodyPr rtlCol="0" anchor="ctr"/>
+          <a:lstStyle/>
+          <a:p>
+            <a:pPr algn="ctr"/>
+          </a:p>
+        </p:txBody>
+      </p:sp>
+      <p:sp>
+        <p:nvSpPr>
+          <p:cNvPr id="23" name="TextBox 22"/>
+          <p:cNvSpPr txBox="1"/>
+          <p:nvPr/>
+        </p:nvSpPr>
+        <p:spPr>
+          <a:xfrm>
+            <a:off x="6080760" y="1143000"/>
+            <a:ext cx="5577840" cy="5303520"/>
+          </a:xfrm>
+          <a:prstGeom prst="rect">
+            <a:avLst/>
+          </a:prstGeom>
+          <a:noFill/>
+        </p:spPr>
+        <p:txBody>
+          <a:bodyPr wrap="none" lIns="0" rIns="0" tIns="0" bIns="0">
+            <a:spAutoFit/>
+          </a:bodyPr>
+          <a:lstStyle/>
+          <a:p>
+            <a:r>
+              <a:rPr sz="1000">
+                <a:solidFill>
+                  <a:srgbClr val="C7D2FE"/>
+                </a:solidFill>
+                <a:latin typeface="Consolas"/>
+              </a:rPr>
+              <a:t># Cell 2: 패키지 설치</a:t>
+            </a:r>
+          </a:p>
+          <a:p>
+            <a:r>
+              <a:rPr sz="1000">
+                <a:solidFill>
+                  <a:srgbClr val="C7D2FE"/>
+                </a:solidFill>
+                <a:latin typeface="Consolas"/>
+              </a:rPr>
+              <a:t>!pip install -q openai</a:t>
+            </a:r>
+          </a:p>
+          <a:p>
+            <a:r>
+              <a:rPr sz="1000">
+                <a:solidFill>
+                  <a:srgbClr val="C7D2FE"/>
+                </a:solidFill>
+                <a:latin typeface="Consolas"/>
               </a:rPr>
               <a:t/>
             </a:r>
-            <a:r>
-              <a:rPr lang="en-US" sz="1800" b="1" dirty="0" err="1">
-                <a:solidFill>
-                  <a:srgbClr val="111848"/>
-                </a:solidFill>
-                <a:latin typeface="Arial" pitchFamily="34" charset="0"/>
-                <a:ea typeface="Arial" pitchFamily="34" charset="-122"/>
-                <a:cs typeface="Arial" pitchFamily="34" charset="-120"/>
-              </a:rPr>
-              <a:t>설정</a:t>
-            </a:r>
-            <a:r>
-              <a:rPr lang="en-US" altLang="ko-KR" b="1" dirty="0">
-                <a:solidFill>
-                  <a:srgbClr val="111848"/>
-                </a:solidFill>
-                <a:latin typeface="Arial" pitchFamily="34" charset="0"/>
-                <a:ea typeface="Arial" pitchFamily="34" charset="-122"/>
-                <a:cs typeface="Arial" pitchFamily="34" charset="-120"/>
-              </a:rPr>
-              <a:t>+ RAG</a:t>
-            </a:r>
-            <a:r>
-              <a:rPr lang="en-US" altLang="ko-KR" b="1" dirty="0" err="1">
-                <a:solidFill>
-                  <a:srgbClr val="111848"/>
-                </a:solidFill>
-                <a:latin typeface="Arial" pitchFamily="34" charset="0"/>
-                <a:ea typeface="Arial" pitchFamily="34" charset="-122"/>
-                <a:cs typeface="Arial" pitchFamily="34" charset="-120"/>
-              </a:rPr>
-              <a:t>인프라</a:t>
-            </a:r>
-            <a:r>
-              <a:rPr lang="en-US" altLang="ko-KR" b="1" dirty="0">
-                <a:solidFill>
-                  <a:srgbClr val="111848"/>
-                </a:solidFill>
-                <a:latin typeface="Arial" pitchFamily="34" charset="0"/>
-                <a:ea typeface="Arial" pitchFamily="34" charset="-122"/>
-                <a:cs typeface="Arial" pitchFamily="34" charset="-120"/>
+          </a:p>
+          <a:p>
+            <a:r>
+              <a:rPr sz="1000">
+                <a:solidFill>
+                  <a:srgbClr val="C7D2FE"/>
+                </a:solidFill>
+                <a:latin typeface="Consolas"/>
+              </a:rPr>
+              <a:t># Cell 3: API 키 + 클라이언트 초기화</a:t>
+            </a:r>
+          </a:p>
+          <a:p>
+            <a:r>
+              <a:rPr sz="1000">
+                <a:solidFill>
+                  <a:srgbClr val="C7D2FE"/>
+                </a:solidFill>
+                <a:latin typeface="Consolas"/>
+              </a:rPr>
+              <a:t>import os</a:t>
+            </a:r>
+          </a:p>
+          <a:p>
+            <a:r>
+              <a:rPr sz="1000">
+                <a:solidFill>
+                  <a:srgbClr val="C7D2FE"/>
+                </a:solidFill>
+                <a:latin typeface="Consolas"/>
+              </a:rPr>
+              <a:t>from openai import OpenAI</a:t>
+            </a:r>
+          </a:p>
+          <a:p>
+            <a:r>
+              <a:rPr sz="1000">
+                <a:solidFill>
+                  <a:srgbClr val="C7D2FE"/>
+                </a:solidFill>
+                <a:latin typeface="Consolas"/>
+              </a:rPr>
+              <a:t>try:</a:t>
+            </a:r>
+          </a:p>
+          <a:p>
+            <a:r>
+              <a:rPr sz="1000">
+                <a:solidFill>
+                  <a:srgbClr val="C7D2FE"/>
+                </a:solidFill>
+                <a:latin typeface="Consolas"/>
+              </a:rPr>
+              <a:t>    from google.colab import userdata</a:t>
+            </a:r>
+          </a:p>
+          <a:p>
+            <a:r>
+              <a:rPr sz="1000">
+                <a:solidFill>
+                  <a:srgbClr val="C7D2FE"/>
+                </a:solidFill>
+                <a:latin typeface="Consolas"/>
+              </a:rPr>
+              <a:t>    DEEPSEEK_API_KEY = userdata.get("DEEPSEEK_API_KEY")</a:t>
+            </a:r>
+          </a:p>
+          <a:p>
+            <a:r>
+              <a:rPr sz="1000">
+                <a:solidFill>
+                  <a:srgbClr val="C7D2FE"/>
+                </a:solidFill>
+                <a:latin typeface="Consolas"/>
+              </a:rPr>
+              <a:t>except Exception:</a:t>
+            </a:r>
+          </a:p>
+          <a:p>
+            <a:r>
+              <a:rPr sz="1000">
+                <a:solidFill>
+                  <a:srgbClr val="C7D2FE"/>
+                </a:solidFill>
+                <a:latin typeface="Consolas"/>
+              </a:rPr>
+              <a:t>    DEEPSEEK_API_KEY = os.environ.get("DEEPSEEK_API_KEY")</a:t>
+            </a:r>
+          </a:p>
+          <a:p>
+            <a:r>
+              <a:rPr sz="1000">
+                <a:solidFill>
+                  <a:srgbClr val="C7D2FE"/>
+                </a:solidFill>
+                <a:latin typeface="Consolas"/>
               </a:rPr>
               <a:t/>
             </a:r>
-            <a:r>
-              <a:rPr lang="en-US" altLang="ko-KR" b="1" dirty="0" err="1">
-                <a:solidFill>
-                  <a:srgbClr val="111848"/>
-                </a:solidFill>
-                <a:latin typeface="Arial" pitchFamily="34" charset="0"/>
-                <a:ea typeface="Arial" pitchFamily="34" charset="-122"/>
-                <a:cs typeface="Arial" pitchFamily="34" charset="-120"/>
-              </a:rPr>
-              <a:t>구축</a:t>
-            </a:r>
-            <a:endParaRPr lang="en-US" sz="1800" dirty="0"/>
-          </a:p>
-        </p:txBody>
-      </p:sp>
-      <p:sp>
-        <p:nvSpPr>
-          <p:cNvPr id="3" name="Shape 1"/>
-          <p:cNvSpPr/>
-          <p:nvPr/>
-        </p:nvSpPr>
-        <p:spPr>
-          <a:xfrm>
-            <a:off x="274320" y="548640"/>
-            <a:ext cx="11612880" cy="36576"/>
-          </a:xfrm>
-          <a:prstGeom prst="rect">
-            <a:avLst/>
-          </a:prstGeom>
-          <a:solidFill>
-            <a:srgbClr val="111848"/>
-          </a:solidFill>
-          <a:ln w="12700">
-            <a:solidFill>
-              <a:srgbClr val="333333"/>
-            </a:solidFill>
-            <a:prstDash val="solid"/>
-          </a:ln>
-        </p:spPr>
-        <p:txBody>
-          <a:bodyPr/>
-          <a:lstStyle/>
-          <a:p>
-            <a:endParaRPr lang="ko-KR" altLang="en-US"/>
-          </a:p>
-        </p:txBody>
-      </p:sp>
-      <p:sp>
-        <p:nvSpPr>
-          <p:cNvPr id="4" name="Shape 2"/>
-          <p:cNvSpPr/>
-          <p:nvPr/>
-        </p:nvSpPr>
-        <p:spPr>
-          <a:xfrm>
-            <a:off x="274320" y="685800"/>
-            <a:ext cx="5486400" cy="1417320"/>
-          </a:xfrm>
-          <a:prstGeom prst="rect">
-            <a:avLst/>
-          </a:prstGeom>
-          <a:solidFill>
-            <a:srgbClr val="FFFFFF"/>
-          </a:solidFill>
-          <a:ln w="15240">
-            <a:solidFill>
-              <a:srgbClr val="1A73E8"/>
-            </a:solidFill>
-            <a:prstDash val="solid"/>
-          </a:ln>
-          <a:effectLst>
-            <a:outerShdw blurRad="63500" dist="25400" dir="8100000" algn="bl" rotWithShape="0">
-              <a:srgbClr val="000000">
-                <a:alpha val="10000"/>
-              </a:srgbClr>
-            </a:outerShdw>
-          </a:effectLst>
-        </p:spPr>
-        <p:txBody>
-          <a:bodyPr/>
-          <a:lstStyle/>
-          <a:p>
-            <a:endParaRPr lang="ko-KR" altLang="en-US"/>
-          </a:p>
-        </p:txBody>
-      </p:sp>
-      <p:sp>
-        <p:nvSpPr>
-          <p:cNvPr id="5" name="Shape 3"/>
-          <p:cNvSpPr/>
-          <p:nvPr/>
-        </p:nvSpPr>
-        <p:spPr>
-          <a:xfrm>
-            <a:off x="274320" y="685800"/>
-            <a:ext cx="5486400" cy="329184"/>
-          </a:xfrm>
-          <a:prstGeom prst="rect">
-            <a:avLst/>
-          </a:prstGeom>
-          <a:solidFill>
-            <a:srgbClr val="1A73E8"/>
-          </a:solidFill>
-          <a:ln w="12700">
-            <a:solidFill>
-              <a:srgbClr val="1A73E8"/>
-            </a:solidFill>
-            <a:prstDash val="solid"/>
-          </a:ln>
-        </p:spPr>
-        <p:txBody>
-          <a:bodyPr/>
-          <a:lstStyle/>
-          <a:p>
-            <a:endParaRPr lang="ko-KR" altLang="en-US"/>
-          </a:p>
-        </p:txBody>
-      </p:sp>
-      <p:sp>
-        <p:nvSpPr>
-          <p:cNvPr id="6" name="Text 4"/>
-          <p:cNvSpPr/>
-          <p:nvPr/>
-        </p:nvSpPr>
-        <p:spPr>
-          <a:xfrm>
-            <a:off x="384048" y="685800"/>
-            <a:ext cx="5266944" cy="329184"/>
-          </a:xfrm>
-          <a:prstGeom prst="rect">
-            <a:avLst/>
-          </a:prstGeom>
-          <a:noFill/>
-          <a:ln/>
-        </p:spPr>
-        <p:txBody>
-          <a:bodyPr wrap="square" lIns="0" tIns="0" rIns="0" bIns="0" rtlCol="0" anchor="ctr"/>
-          <a:lstStyle/>
-          <a:p>
-            <a:pPr marL="0" indent="0">
-              <a:buNone/>
-            </a:pPr>
-            <a:r>
-              <a:rPr lang="en-US" sz="1100" b="1" dirty="0">
-                <a:solidFill>
-                  <a:srgbClr val="FFFFFF"/>
-                </a:solidFill>
-                <a:latin typeface="Arial" pitchFamily="34" charset="0"/>
-                <a:ea typeface="Arial" pitchFamily="34" charset="-122"/>
-                <a:cs typeface="Arial" pitchFamily="34" charset="-120"/>
-              </a:rPr>
-              <a:t>① API 키 설정</a:t>
-            </a:r>
-            <a:endParaRPr lang="en-US" sz="1100" dirty="0"/>
-          </a:p>
-        </p:txBody>
-      </p:sp>
-      <p:sp>
-        <p:nvSpPr>
-          <p:cNvPr id="7" name="Text 5"/>
-          <p:cNvSpPr/>
-          <p:nvPr/>
-        </p:nvSpPr>
-        <p:spPr>
-          <a:xfrm>
-            <a:off x="411480" y="1088136"/>
-            <a:ext cx="5212080" cy="246888"/>
-          </a:xfrm>
-          <a:prstGeom prst="rect">
-            <a:avLst/>
-          </a:prstGeom>
-          <a:noFill/>
-          <a:ln/>
-        </p:spPr>
-        <p:txBody>
-          <a:bodyPr wrap="square" rtlCol="0" anchor="ctr"/>
-          <a:lstStyle/>
-          <a:p>
-            <a:pPr marL="0" indent="0">
-              <a:buNone/>
-            </a:pPr>
-            <a:r>
-              <a:rPr lang="en-US" sz="950" dirty="0">
-                <a:solidFill>
-                  <a:srgbClr val="111848"/>
-                </a:solidFill>
-                <a:latin typeface="Arial" pitchFamily="34" charset="0"/>
-                <a:ea typeface="Arial" pitchFamily="34" charset="-122"/>
-                <a:cs typeface="Arial" pitchFamily="34" charset="-120"/>
-              </a:rPr>
-              <a:t>Colab: 왼쪽 🔑 아이콘 → Secrets</a:t>
-            </a:r>
-            <a:endParaRPr lang="en-US" sz="950" dirty="0"/>
-          </a:p>
-        </p:txBody>
-      </p:sp>
-      <p:sp>
-        <p:nvSpPr>
-          <p:cNvPr id="8" name="Text 6"/>
-          <p:cNvSpPr/>
-          <p:nvPr/>
-        </p:nvSpPr>
-        <p:spPr>
-          <a:xfrm>
-            <a:off x="411480" y="1362456"/>
-            <a:ext cx="5212080" cy="246888"/>
-          </a:xfrm>
-          <a:prstGeom prst="rect">
-            <a:avLst/>
-          </a:prstGeom>
-          <a:noFill/>
-          <a:ln/>
-        </p:spPr>
-        <p:txBody>
-          <a:bodyPr wrap="square" rtlCol="0" anchor="ctr"/>
-          <a:lstStyle/>
-          <a:p>
-            <a:pPr marL="0" indent="0">
-              <a:buNone/>
-            </a:pPr>
-            <a:r>
-              <a:rPr lang="en-US" sz="950" dirty="0">
-                <a:solidFill>
-                  <a:srgbClr val="111848"/>
-                </a:solidFill>
-                <a:latin typeface="Arial" pitchFamily="34" charset="0"/>
-                <a:ea typeface="Arial" pitchFamily="34" charset="-122"/>
-                <a:cs typeface="Arial" pitchFamily="34" charset="-120"/>
-              </a:rPr>
-              <a:t>→ DEEPSEEK_API_KEY 추가</a:t>
-            </a:r>
-            <a:endParaRPr lang="en-US" sz="950" dirty="0"/>
-          </a:p>
-        </p:txBody>
-      </p:sp>
-      <p:sp>
-        <p:nvSpPr>
-          <p:cNvPr id="9" name="Text 7"/>
-          <p:cNvSpPr/>
-          <p:nvPr/>
-        </p:nvSpPr>
-        <p:spPr>
-          <a:xfrm>
-            <a:off x="411480" y="1636776"/>
-            <a:ext cx="5212080" cy="246888"/>
-          </a:xfrm>
-          <a:prstGeom prst="rect">
-            <a:avLst/>
-          </a:prstGeom>
-          <a:noFill/>
-          <a:ln/>
-        </p:spPr>
-        <p:txBody>
-          <a:bodyPr wrap="square" rtlCol="0" anchor="ctr"/>
-          <a:lstStyle/>
-          <a:p>
-            <a:pPr marL="0" indent="0">
-              <a:buNone/>
-            </a:pPr>
-            <a:r>
-              <a:rPr lang="en-US" sz="950" dirty="0">
-                <a:solidFill>
-                  <a:srgbClr val="94A3B8"/>
-                </a:solidFill>
-                <a:latin typeface="Arial" pitchFamily="34" charset="0"/>
-                <a:ea typeface="Arial" pitchFamily="34" charset="-122"/>
-                <a:cs typeface="Arial" pitchFamily="34" charset="-120"/>
-              </a:rPr>
-              <a:t>키 없으면 진행 불가</a:t>
-            </a:r>
-            <a:endParaRPr lang="en-US" sz="950" dirty="0"/>
-          </a:p>
-        </p:txBody>
-      </p:sp>
-      <p:sp>
-        <p:nvSpPr>
-          <p:cNvPr id="10" name="Shape 8"/>
-          <p:cNvSpPr/>
-          <p:nvPr/>
-        </p:nvSpPr>
-        <p:spPr>
-          <a:xfrm>
-            <a:off x="274320" y="2212848"/>
-            <a:ext cx="5486400" cy="1325880"/>
-          </a:xfrm>
-          <a:prstGeom prst="rect">
-            <a:avLst/>
-          </a:prstGeom>
-          <a:solidFill>
-            <a:srgbClr val="FFFFFF"/>
-          </a:solidFill>
-          <a:ln w="15240">
-            <a:solidFill>
-              <a:srgbClr val="10B981"/>
-            </a:solidFill>
-            <a:prstDash val="solid"/>
-          </a:ln>
-          <a:effectLst>
-            <a:outerShdw blurRad="63500" dist="25400" dir="8100000" algn="bl" rotWithShape="0">
-              <a:srgbClr val="000000">
-                <a:alpha val="10000"/>
-              </a:srgbClr>
-            </a:outerShdw>
-          </a:effectLst>
-        </p:spPr>
-        <p:txBody>
-          <a:bodyPr/>
-          <a:lstStyle/>
-          <a:p>
-            <a:endParaRPr lang="ko-KR" altLang="en-US"/>
-          </a:p>
-        </p:txBody>
-      </p:sp>
-      <p:sp>
-        <p:nvSpPr>
-          <p:cNvPr id="11" name="Shape 9"/>
-          <p:cNvSpPr/>
-          <p:nvPr/>
-        </p:nvSpPr>
-        <p:spPr>
-          <a:xfrm>
-            <a:off x="274320" y="2212848"/>
-            <a:ext cx="5486400" cy="329184"/>
-          </a:xfrm>
-          <a:prstGeom prst="rect">
-            <a:avLst/>
-          </a:prstGeom>
-          <a:solidFill>
-            <a:srgbClr val="10B981"/>
-          </a:solidFill>
-          <a:ln w="12700">
-            <a:solidFill>
-              <a:srgbClr val="10B981"/>
-            </a:solidFill>
-            <a:prstDash val="solid"/>
-          </a:ln>
-        </p:spPr>
-        <p:txBody>
-          <a:bodyPr/>
-          <a:lstStyle/>
-          <a:p>
-            <a:endParaRPr lang="ko-KR" altLang="en-US"/>
-          </a:p>
-        </p:txBody>
-      </p:sp>
-      <p:sp>
-        <p:nvSpPr>
-          <p:cNvPr id="12" name="Text 10"/>
-          <p:cNvSpPr/>
-          <p:nvPr/>
-        </p:nvSpPr>
-        <p:spPr>
-          <a:xfrm>
-            <a:off x="384048" y="2212848"/>
-            <a:ext cx="5266944" cy="329184"/>
-          </a:xfrm>
-          <a:prstGeom prst="rect">
-            <a:avLst/>
-          </a:prstGeom>
-          <a:noFill/>
-          <a:ln/>
-        </p:spPr>
-        <p:txBody>
-          <a:bodyPr wrap="square" lIns="0" tIns="0" rIns="0" bIns="0" rtlCol="0" anchor="ctr"/>
-          <a:lstStyle/>
-          <a:p>
-            <a:pPr marL="0" indent="0">
-              <a:buNone/>
-            </a:pPr>
-            <a:r>
-              <a:rPr lang="en-US" sz="1100" b="1" dirty="0">
-                <a:solidFill>
-                  <a:srgbClr val="FFFFFF"/>
-                </a:solidFill>
-                <a:latin typeface="Arial" pitchFamily="34" charset="0"/>
-                <a:ea typeface="Arial" pitchFamily="34" charset="-122"/>
-                <a:cs typeface="Arial" pitchFamily="34" charset="-120"/>
-              </a:rPr>
-              <a:t>② 패키지 설치 (최초 1회)</a:t>
-            </a:r>
-            <a:endParaRPr lang="en-US" sz="1100" dirty="0"/>
-          </a:p>
-        </p:txBody>
-      </p:sp>
-      <p:sp>
-        <p:nvSpPr>
-          <p:cNvPr id="13" name="Text 11"/>
-          <p:cNvSpPr/>
-          <p:nvPr/>
-        </p:nvSpPr>
-        <p:spPr>
-          <a:xfrm>
-            <a:off x="411480" y="2615184"/>
-            <a:ext cx="5212080" cy="246888"/>
-          </a:xfrm>
-          <a:prstGeom prst="rect">
-            <a:avLst/>
-          </a:prstGeom>
-          <a:noFill/>
-          <a:ln/>
-        </p:spPr>
-        <p:txBody>
-          <a:bodyPr wrap="square" rtlCol="0" anchor="ctr"/>
-          <a:lstStyle/>
-          <a:p>
-            <a:pPr marL="0" indent="0">
-              <a:buNone/>
-            </a:pPr>
-            <a:r>
-              <a:rPr lang="en-US" sz="950" dirty="0">
-                <a:solidFill>
-                  <a:srgbClr val="111848"/>
-                </a:solidFill>
-                <a:latin typeface="Arial" pitchFamily="34" charset="0"/>
-                <a:ea typeface="Arial" pitchFamily="34" charset="-122"/>
-                <a:cs typeface="Arial" pitchFamily="34" charset="-120"/>
-              </a:rPr>
-              <a:t>!pip install -q openai python-dotenv</a:t>
-            </a:r>
-            <a:endParaRPr lang="en-US" sz="950" dirty="0"/>
-          </a:p>
-        </p:txBody>
-      </p:sp>
-      <p:sp>
-        <p:nvSpPr>
-          <p:cNvPr id="14" name="Text 12"/>
-          <p:cNvSpPr/>
-          <p:nvPr/>
-        </p:nvSpPr>
-        <p:spPr>
-          <a:xfrm>
-            <a:off x="411480" y="2889504"/>
-            <a:ext cx="5212080" cy="246888"/>
-          </a:xfrm>
-          <a:prstGeom prst="rect">
-            <a:avLst/>
-          </a:prstGeom>
-          <a:noFill/>
-          <a:ln/>
-        </p:spPr>
-        <p:txBody>
-          <a:bodyPr wrap="square" rtlCol="0" anchor="ctr"/>
-          <a:lstStyle/>
-          <a:p>
-            <a:pPr marL="0" indent="0">
-              <a:buNone/>
-            </a:pPr>
-            <a:r>
-              <a:rPr lang="en-US" sz="950" dirty="0">
-                <a:solidFill>
-                  <a:srgbClr val="94A3B8"/>
-                </a:solidFill>
-                <a:latin typeface="Arial" pitchFamily="34" charset="0"/>
-                <a:ea typeface="Arial" pitchFamily="34" charset="-122"/>
-                <a:cs typeface="Arial" pitchFamily="34" charset="-120"/>
-              </a:rPr>
-              <a:t>Colab 런타임 재시작 불필요</a:t>
-            </a:r>
-            <a:endParaRPr lang="en-US" sz="950" dirty="0"/>
-          </a:p>
-        </p:txBody>
-      </p:sp>
-      <p:sp>
-        <p:nvSpPr>
-          <p:cNvPr id="15" name="Shape 13"/>
-          <p:cNvSpPr/>
-          <p:nvPr/>
-        </p:nvSpPr>
-        <p:spPr>
-          <a:xfrm>
-            <a:off x="274320" y="3648456"/>
-            <a:ext cx="5486400" cy="1371600"/>
-          </a:xfrm>
-          <a:prstGeom prst="rect">
-            <a:avLst/>
-          </a:prstGeom>
-          <a:solidFill>
-            <a:srgbClr val="FFFFFF"/>
-          </a:solidFill>
-          <a:ln w="15240">
-            <a:solidFill>
-              <a:srgbClr val="2563EB"/>
-            </a:solidFill>
-            <a:prstDash val="solid"/>
-          </a:ln>
-          <a:effectLst>
-            <a:outerShdw blurRad="63500" dist="25400" dir="8100000" algn="bl" rotWithShape="0">
-              <a:srgbClr val="000000">
-                <a:alpha val="10000"/>
-              </a:srgbClr>
-            </a:outerShdw>
-          </a:effectLst>
-        </p:spPr>
-        <p:txBody>
-          <a:bodyPr/>
-          <a:lstStyle/>
-          <a:p>
-            <a:endParaRPr lang="ko-KR" altLang="en-US"/>
-          </a:p>
-        </p:txBody>
-      </p:sp>
-      <p:sp>
-        <p:nvSpPr>
-          <p:cNvPr id="16" name="Shape 14"/>
-          <p:cNvSpPr/>
-          <p:nvPr/>
-        </p:nvSpPr>
-        <p:spPr>
-          <a:xfrm>
-            <a:off x="274320" y="3648456"/>
-            <a:ext cx="5486400" cy="329184"/>
-          </a:xfrm>
-          <a:prstGeom prst="rect">
-            <a:avLst/>
-          </a:prstGeom>
-          <a:solidFill>
-            <a:srgbClr val="2563EB"/>
-          </a:solidFill>
-          <a:ln w="12700">
-            <a:solidFill>
-              <a:srgbClr val="2563EB"/>
-            </a:solidFill>
-            <a:prstDash val="solid"/>
-          </a:ln>
-        </p:spPr>
-        <p:txBody>
-          <a:bodyPr/>
-          <a:lstStyle/>
-          <a:p>
-            <a:endParaRPr lang="ko-KR" altLang="en-US"/>
-          </a:p>
-        </p:txBody>
-      </p:sp>
-      <p:sp>
-        <p:nvSpPr>
-          <p:cNvPr id="17" name="Text 15"/>
-          <p:cNvSpPr/>
-          <p:nvPr/>
-        </p:nvSpPr>
-        <p:spPr>
-          <a:xfrm>
-            <a:off x="384048" y="3648456"/>
-            <a:ext cx="5266944" cy="329184"/>
-          </a:xfrm>
-          <a:prstGeom prst="rect">
-            <a:avLst/>
-          </a:prstGeom>
-          <a:noFill/>
-          <a:ln/>
-        </p:spPr>
-        <p:txBody>
-          <a:bodyPr wrap="square" lIns="0" tIns="0" rIns="0" bIns="0" rtlCol="0" anchor="ctr"/>
-          <a:lstStyle/>
-          <a:p>
-            <a:pPr marL="0" indent="0">
-              <a:buNone/>
-            </a:pPr>
-            <a:r>
-              <a:rPr lang="en-US" sz="1100" b="1" dirty="0">
-                <a:solidFill>
-                  <a:srgbClr val="FFFFFF"/>
-                </a:solidFill>
-                <a:latin typeface="Arial" pitchFamily="34" charset="0"/>
-                <a:ea typeface="Arial" pitchFamily="34" charset="-122"/>
-                <a:cs typeface="Arial" pitchFamily="34" charset="-120"/>
-              </a:rPr>
-              <a:t>③ 모델 선택</a:t>
-            </a:r>
-            <a:endParaRPr lang="en-US" sz="1100" dirty="0"/>
-          </a:p>
-        </p:txBody>
-      </p:sp>
-      <p:sp>
-        <p:nvSpPr>
-          <p:cNvPr id="18" name="Text 16"/>
-          <p:cNvSpPr/>
-          <p:nvPr/>
-        </p:nvSpPr>
-        <p:spPr>
-          <a:xfrm>
-            <a:off x="411480" y="4050792"/>
-            <a:ext cx="5212080" cy="246888"/>
-          </a:xfrm>
-          <a:prstGeom prst="rect">
-            <a:avLst/>
-          </a:prstGeom>
-          <a:noFill/>
-          <a:ln/>
-        </p:spPr>
-        <p:txBody>
-          <a:bodyPr wrap="square" rtlCol="0" anchor="ctr"/>
-          <a:lstStyle/>
-          <a:p>
-            <a:pPr marL="0" indent="0">
-              <a:buNone/>
-            </a:pPr>
-            <a:r>
-              <a:rPr lang="en-US" sz="950" dirty="0">
-                <a:solidFill>
-                  <a:srgbClr val="111848"/>
-                </a:solidFill>
-                <a:latin typeface="Arial" pitchFamily="34" charset="0"/>
-                <a:ea typeface="Arial" pitchFamily="34" charset="-122"/>
-                <a:cs typeface="Arial" pitchFamily="34" charset="-120"/>
+          </a:p>
+          <a:p>
+            <a:r>
+              <a:rPr sz="1000">
+                <a:solidFill>
+                  <a:srgbClr val="C7D2FE"/>
+                </a:solidFill>
+                <a:latin typeface="Consolas"/>
+              </a:rPr>
+              <a:t>client = OpenAI(</a:t>
+            </a:r>
+          </a:p>
+          <a:p>
+            <a:r>
+              <a:rPr sz="1000">
+                <a:solidFill>
+                  <a:srgbClr val="C7D2FE"/>
+                </a:solidFill>
+                <a:latin typeface="Consolas"/>
+              </a:rPr>
+              <a:t>    base_url="https://api.deepseek.com/v1",</a:t>
+            </a:r>
+          </a:p>
+          <a:p>
+            <a:r>
+              <a:rPr sz="1000">
+                <a:solidFill>
+                  <a:srgbClr val="C7D2FE"/>
+                </a:solidFill>
+                <a:latin typeface="Consolas"/>
+              </a:rPr>
+              <a:t>    api_key=DEEPSEEK_API_KEY,</a:t>
+            </a:r>
+          </a:p>
+          <a:p>
+            <a:r>
+              <a:rPr sz="1000">
+                <a:solidFill>
+                  <a:srgbClr val="C7D2FE"/>
+                </a:solidFill>
+                <a:latin typeface="Consolas"/>
+              </a:rPr>
+              <a:t>)</a:t>
+            </a:r>
+          </a:p>
+          <a:p>
+            <a:r>
+              <a:rPr sz="1000">
+                <a:solidFill>
+                  <a:srgbClr val="C7D2FE"/>
+                </a:solidFill>
+                <a:latin typeface="Consolas"/>
               </a:rPr>
               <a:t>MODEL = "deepseek-chat"</a:t>
             </a:r>
-            <a:endParaRPr lang="en-US" sz="950" dirty="0"/>
-          </a:p>
-        </p:txBody>
-      </p:sp>
-      <p:sp>
-        <p:nvSpPr>
-          <p:cNvPr id="19" name="Text 17"/>
-          <p:cNvSpPr/>
-          <p:nvPr/>
-        </p:nvSpPr>
-        <p:spPr>
-          <a:xfrm>
-            <a:off x="411480" y="4325112"/>
-            <a:ext cx="5212080" cy="246888"/>
-          </a:xfrm>
-          <a:prstGeom prst="rect">
-            <a:avLst/>
-          </a:prstGeom>
-          <a:noFill/>
-          <a:ln/>
-        </p:spPr>
-        <p:txBody>
-          <a:bodyPr wrap="square" rtlCol="0" anchor="ctr"/>
-          <a:lstStyle/>
-          <a:p>
-            <a:pPr marL="0" indent="0">
-              <a:buNone/>
-            </a:pPr>
-            <a:r>
-              <a:rPr lang="en-US" sz="950" dirty="0">
-                <a:solidFill>
-                  <a:srgbClr val="111848"/>
-                </a:solidFill>
-                <a:latin typeface="Arial" pitchFamily="34" charset="0"/>
-                <a:ea typeface="Arial" pitchFamily="34" charset="-122"/>
-                <a:cs typeface="Arial" pitchFamily="34" charset="-120"/>
-              </a:rPr>
-              <a:t>client 초기화 및 API 키 로드</a:t>
-            </a:r>
-            <a:endParaRPr lang="en-US" sz="950" dirty="0"/>
-          </a:p>
-        </p:txBody>
-      </p:sp>
-      <p:sp>
-        <p:nvSpPr>
-          <p:cNvPr id="20" name="Text 18"/>
-          <p:cNvSpPr/>
-          <p:nvPr/>
-        </p:nvSpPr>
-        <p:spPr>
-          <a:xfrm>
-            <a:off x="411480" y="4599432"/>
-            <a:ext cx="5212080" cy="246888"/>
-          </a:xfrm>
-          <a:prstGeom prst="rect">
-            <a:avLst/>
-          </a:prstGeom>
-          <a:noFill/>
-          <a:ln/>
-        </p:spPr>
-        <p:txBody>
-          <a:bodyPr wrap="square" rtlCol="0" anchor="ctr"/>
-          <a:lstStyle/>
-          <a:p>
-            <a:pPr marL="0" indent="0">
-              <a:buNone/>
-            </a:pPr>
-            <a:r>
-              <a:rPr lang="en-US" sz="950" dirty="0">
-                <a:solidFill>
-                  <a:srgbClr val="94A3B8"/>
-                </a:solidFill>
-                <a:latin typeface="Arial" pitchFamily="34" charset="0"/>
-                <a:ea typeface="Arial" pitchFamily="34" charset="-122"/>
-                <a:cs typeface="Arial" pitchFamily="34" charset="-120"/>
-              </a:rPr>
-              <a:t>아래 코드를 Cell 2~5 순서대로 실행</a:t>
-            </a:r>
-            <a:endParaRPr lang="en-US" sz="950" dirty="0"/>
-          </a:p>
-        </p:txBody>
-      </p:sp>
-      <p:sp>
-        <p:nvSpPr>
-          <p:cNvPr id="21" name="Text 19"/>
-          <p:cNvSpPr/>
-          <p:nvPr/>
-        </p:nvSpPr>
-        <p:spPr>
-          <a:xfrm>
-            <a:off x="6035040" y="685800"/>
-            <a:ext cx="5852160" cy="320040"/>
-          </a:xfrm>
-          <a:prstGeom prst="rect">
-            <a:avLst/>
-          </a:prstGeom>
-          <a:noFill/>
-          <a:ln/>
-        </p:spPr>
-        <p:txBody>
-          <a:bodyPr wrap="square" rtlCol="0" anchor="ctr"/>
-          <a:lstStyle/>
-          <a:p>
-            <a:pPr marL="0" indent="0">
-              <a:buNone/>
-            </a:pPr>
-            <a:r>
-              <a:rPr lang="en-US" sz="1200" b="1" dirty="0">
-                <a:solidFill>
-                  <a:srgbClr val="111848"/>
-                </a:solidFill>
-                <a:latin typeface="Arial" pitchFamily="34" charset="0"/>
-                <a:ea typeface="Arial" pitchFamily="34" charset="-122"/>
-                <a:cs typeface="Arial" pitchFamily="34" charset="-120"/>
-              </a:rPr>
-              <a:t>실행할 코드 (Cell 2~5)</a:t>
-            </a:r>
-            <a:endParaRPr lang="en-US" sz="1200" dirty="0"/>
-          </a:p>
-        </p:txBody>
-      </p:sp>
-      <p:sp>
-        <p:nvSpPr>
-          <p:cNvPr id="47" name="Text 45"/>
-          <p:cNvSpPr/>
-          <p:nvPr/>
-        </p:nvSpPr>
-        <p:spPr>
-          <a:xfrm>
-            <a:off x="6172200" y="5271914"/>
-            <a:ext cx="5577840" cy="228600"/>
-          </a:xfrm>
-          <a:prstGeom prst="rect">
-            <a:avLst/>
-          </a:prstGeom>
-          <a:noFill/>
-          <a:ln/>
-        </p:spPr>
-        <p:txBody>
-          <a:bodyPr wrap="square" lIns="0" tIns="0" rIns="0" bIns="0" rtlCol="0" anchor="ctr"/>
-          <a:lstStyle/>
-          <a:p>
-            <a:pPr marL="0" indent="0">
-              <a:buNone/>
-            </a:pPr>
-            <a:r>
-              <a:rPr lang="en-US" sz="950" dirty="0">
-                <a:solidFill>
-                  <a:srgbClr val="E6EDF3"/>
-                </a:solidFill>
-                <a:latin typeface="Consolas" pitchFamily="34" charset="0"/>
-                <a:ea typeface="Consolas" pitchFamily="34" charset="-122"/>
-                <a:cs typeface="Consolas" pitchFamily="34" charset="-120"/>
-              </a:rPr>
-              <a:t>config=config).text</a:t>
-            </a:r>
-            <a:endParaRPr lang="en-US" sz="950" dirty="0"/>
-          </a:p>
-        </p:txBody>
-      </p:sp>
-      <p:sp>
-        <p:nvSpPr>
-          <p:cNvPr id="48" name="Shape 46"/>
-          <p:cNvSpPr/>
-          <p:nvPr/>
-        </p:nvSpPr>
-        <p:spPr>
-          <a:xfrm>
-            <a:off x="274320" y="5138928"/>
-            <a:ext cx="5486400" cy="420624"/>
-          </a:xfrm>
-          <a:prstGeom prst="rect">
-            <a:avLst/>
-          </a:prstGeom>
-          <a:solidFill>
-            <a:srgbClr val="FEF3C7"/>
-          </a:solidFill>
-          <a:ln w="12700">
-            <a:solidFill>
-              <a:srgbClr val="F59E0B"/>
-            </a:solidFill>
-            <a:prstDash val="solid"/>
-          </a:ln>
-        </p:spPr>
-        <p:txBody>
-          <a:bodyPr/>
-          <a:lstStyle/>
-          <a:p>
-            <a:endParaRPr lang="ko-KR" altLang="en-US"/>
-          </a:p>
-        </p:txBody>
-      </p:sp>
-      <p:sp>
-        <p:nvSpPr>
-          <p:cNvPr id="49" name="Text 47"/>
-          <p:cNvSpPr/>
-          <p:nvPr/>
-        </p:nvSpPr>
-        <p:spPr>
-          <a:xfrm>
-            <a:off x="411480" y="5138928"/>
-            <a:ext cx="5212080" cy="420624"/>
-          </a:xfrm>
-          <a:prstGeom prst="rect">
-            <a:avLst/>
-          </a:prstGeom>
-          <a:noFill/>
-          <a:ln/>
-        </p:spPr>
-        <p:txBody>
-          <a:bodyPr wrap="square" rtlCol="0" anchor="ctr"/>
-          <a:lstStyle/>
-          <a:p>
-            <a:pPr marL="0" indent="0">
-              <a:buNone/>
-            </a:pPr>
-            <a:r>
-              <a:rPr lang="en-US" sz="1000" dirty="0">
-                <a:solidFill>
-                  <a:srgbClr val="92400E"/>
-                </a:solidFill>
-                <a:latin typeface="Arial" pitchFamily="34" charset="0"/>
-                <a:ea typeface="Arial" pitchFamily="34" charset="-122"/>
-                <a:cs typeface="Arial" pitchFamily="34" charset="-120"/>
-              </a:rPr>
-              <a:t>셀을 위에서 아래로 순서대로 실행 — 한 셀씩 Shift+Enter</a:t>
-            </a:r>
-            <a:endParaRPr lang="en-US" sz="1000" dirty="0"/>
-          </a:p>
-        </p:txBody>
-      </p:sp>
-      <p:sp>
-        <p:nvSpPr>
-          <p:cNvPr id="23" name="Text 21"/>
-          <p:cNvSpPr/>
-          <p:nvPr/>
-        </p:nvSpPr>
-        <p:spPr>
-          <a:xfrm>
-            <a:off x="6172200" y="704088"/>
-            <a:ext cx="5577840" cy="228600"/>
-          </a:xfrm>
-          <a:prstGeom prst="rect">
-            <a:avLst/>
-          </a:prstGeom>
-          <a:noFill/>
-          <a:ln/>
-        </p:spPr>
-        <p:txBody>
-          <a:bodyPr wrap="square" lIns="0" tIns="0" rIns="0" bIns="0" rtlCol="0" anchor="ctr"/>
-          <a:lstStyle/>
-          <a:p>
-            <a:pPr marL="0" indent="0">
-              <a:buNone/>
-            </a:pPr>
-            <a:r>
-              <a:rPr lang="en-US" sz="950" dirty="0">
-                <a:solidFill>
-                  <a:srgbClr val="8B949E"/>
-                </a:solidFill>
-                <a:latin typeface="Consolas" pitchFamily="34" charset="0"/>
-                <a:ea typeface="Consolas" pitchFamily="34" charset="-122"/>
-                <a:cs typeface="Consolas" pitchFamily="34" charset="-120"/>
-              </a:rPr>
-              <a:t># Cell 2: 패키지 설치</a:t>
-            </a:r>
-            <a:endParaRPr lang="en-US" sz="950" dirty="0"/>
-          </a:p>
-        </p:txBody>
-      </p:sp>
-      <p:sp>
-        <p:nvSpPr>
-          <p:cNvPr id="24" name="Text 22"/>
-          <p:cNvSpPr/>
-          <p:nvPr/>
-        </p:nvSpPr>
-        <p:spPr>
-          <a:xfrm>
-            <a:off x="6172200" y="950976"/>
-            <a:ext cx="5577840" cy="228600"/>
-          </a:xfrm>
-          <a:prstGeom prst="rect">
-            <a:avLst/>
-          </a:prstGeom>
-          <a:noFill/>
-          <a:ln/>
-        </p:spPr>
-        <p:txBody>
-          <a:bodyPr wrap="square" lIns="0" tIns="0" rIns="0" bIns="0" rtlCol="0" anchor="ctr"/>
-          <a:lstStyle/>
-          <a:p>
-            <a:pPr marL="0" indent="0">
-              <a:buNone/>
-            </a:pPr>
-            <a:r>
-              <a:rPr lang="en-US" sz="950" dirty="0">
-                <a:solidFill>
-                  <a:srgbClr val="E6EDF3"/>
-                </a:solidFill>
-                <a:latin typeface="Consolas" pitchFamily="34" charset="0"/>
-                <a:ea typeface="Consolas" pitchFamily="34" charset="-122"/>
-                <a:cs typeface="Consolas" pitchFamily="34" charset="-120"/>
-              </a:rPr>
-              <a:t>!pip install -q openai python-dotenv</a:t>
-            </a:r>
-            <a:endParaRPr lang="en-US" sz="950" dirty="0"/>
-          </a:p>
-        </p:txBody>
-      </p:sp>
-      <p:sp>
-        <p:nvSpPr>
-          <p:cNvPr id="25" name="Text 23"/>
-          <p:cNvSpPr/>
-          <p:nvPr/>
-        </p:nvSpPr>
-        <p:spPr>
-          <a:xfrm>
-            <a:off x="6172200" y="1197864"/>
-            <a:ext cx="5577840" cy="228600"/>
-          </a:xfrm>
-          <a:prstGeom prst="rect">
-            <a:avLst/>
-          </a:prstGeom>
-          <a:noFill/>
-          <a:ln/>
-        </p:spPr>
-        <p:txBody>
-          <a:bodyPr wrap="square" lIns="0" tIns="0" rIns="0" bIns="0" rtlCol="0" anchor="ctr"/>
-          <a:lstStyle/>
-          <a:p>
-            <a:pPr marL="0" indent="0">
-              <a:buNone/>
-            </a:pPr>
-            <a:endParaRPr lang="en-US" sz="950" dirty="0"/>
-          </a:p>
-        </p:txBody>
-      </p:sp>
-      <p:sp>
-        <p:nvSpPr>
-          <p:cNvPr id="26" name="Text 24"/>
-          <p:cNvSpPr/>
-          <p:nvPr/>
-        </p:nvSpPr>
-        <p:spPr>
-          <a:xfrm>
-            <a:off x="6172200" y="1444752"/>
-            <a:ext cx="5577840" cy="228600"/>
-          </a:xfrm>
-          <a:prstGeom prst="rect">
-            <a:avLst/>
-          </a:prstGeom>
-          <a:noFill/>
-          <a:ln/>
-        </p:spPr>
-        <p:txBody>
-          <a:bodyPr wrap="square" lIns="0" tIns="0" rIns="0" bIns="0" rtlCol="0" anchor="ctr"/>
-          <a:lstStyle/>
-          <a:p>
-            <a:pPr marL="0" indent="0">
-              <a:buNone/>
-            </a:pPr>
-            <a:r>
-              <a:rPr lang="en-US" sz="950" dirty="0">
-                <a:solidFill>
-                  <a:srgbClr val="8B949E"/>
-                </a:solidFill>
-                <a:latin typeface="Consolas" pitchFamily="34" charset="0"/>
-                <a:ea typeface="Consolas" pitchFamily="34" charset="-122"/>
-                <a:cs typeface="Consolas" pitchFamily="34" charset="-120"/>
-              </a:rPr>
-              <a:t># Cell 3: API 키 + 클라이언트 초기화</a:t>
-            </a:r>
-            <a:endParaRPr lang="en-US" sz="950" dirty="0"/>
-          </a:p>
-        </p:txBody>
-      </p:sp>
-      <p:sp>
-        <p:nvSpPr>
-          <p:cNvPr id="27" name="Text 25"/>
-          <p:cNvSpPr/>
-          <p:nvPr/>
-        </p:nvSpPr>
-        <p:spPr>
-          <a:xfrm>
-            <a:off x="6172200" y="1691640"/>
-            <a:ext cx="5577840" cy="228600"/>
-          </a:xfrm>
-          <a:prstGeom prst="rect">
-            <a:avLst/>
-          </a:prstGeom>
-          <a:noFill/>
-          <a:ln/>
-        </p:spPr>
-        <p:txBody>
-          <a:bodyPr wrap="square" lIns="0" tIns="0" rIns="0" bIns="0" rtlCol="0" anchor="ctr"/>
-          <a:lstStyle/>
-          <a:p>
-            <a:pPr marL="0" indent="0">
-              <a:buNone/>
-            </a:pPr>
-            <a:r>
-              <a:rPr lang="en-US" sz="950" dirty="0">
-                <a:solidFill>
-                  <a:srgbClr val="E6EDF3"/>
-                </a:solidFill>
-                <a:latin typeface="Consolas" pitchFamily="34" charset="0"/>
-                <a:ea typeface="Consolas" pitchFamily="34" charset="-122"/>
-                <a:cs typeface="Consolas" pitchFamily="34" charset="-120"/>
-              </a:rPr>
-              <a:t>import</a:t>
-            </a:r>
-            <a:r>
-              <a:rPr lang="en-US" sz="950" dirty="0" err="1">
-                <a:solidFill>
-                  <a:srgbClr val="E6EDF3"/>
-                </a:solidFill>
-                <a:latin typeface="Consolas" pitchFamily="34" charset="0"/>
-                <a:ea typeface="Consolas" pitchFamily="34" charset="-122"/>
-                <a:cs typeface="Consolas" pitchFamily="34" charset="-120"/>
-              </a:rPr>
-              <a:t>os</a:t>
-            </a:r>
-            <a:r>
-              <a:rPr lang="en-US" sz="950" dirty="0">
-                <a:solidFill>
-                  <a:srgbClr val="E6EDF3"/>
-                </a:solidFill>
-                <a:latin typeface="Consolas" pitchFamily="34" charset="0"/>
-                <a:ea typeface="Consolas" pitchFamily="34" charset="-122"/>
-                <a:cs typeface="Consolas" pitchFamily="34" charset="-120"/>
-              </a:rPr>
-              <a:t>, google-</a:t>
-            </a:r>
-            <a:r>
-              <a:rPr lang="en-US" sz="950" dirty="0" err="1">
-                <a:solidFill>
-                  <a:srgbClr val="E6EDF3"/>
-                </a:solidFill>
-                <a:latin typeface="Consolas" pitchFamily="34" charset="0"/>
-                <a:ea typeface="Consolas" pitchFamily="34" charset="-122"/>
-                <a:cs typeface="Consolas" pitchFamily="34" charset="-120"/>
-              </a:rPr>
-              <a:t>genai</a:t>
-            </a:r>
-            <a:r>
-              <a:rPr lang="en-US" sz="950" dirty="0">
-                <a:solidFill>
-                  <a:srgbClr val="E6EDF3"/>
-                </a:solidFill>
-                <a:latin typeface="Consolas" pitchFamily="34" charset="0"/>
-                <a:ea typeface="Consolas" pitchFamily="34" charset="-122"/>
-                <a:cs typeface="Consolas" pitchFamily="34" charset="-120"/>
-              </a:rPr>
-              <a:t>as</a:t>
-            </a:r>
-            <a:r>
-              <a:rPr lang="en-US" sz="950" dirty="0" err="1">
-                <a:solidFill>
-                  <a:srgbClr val="E6EDF3"/>
-                </a:solidFill>
-                <a:latin typeface="Consolas" pitchFamily="34" charset="0"/>
-                <a:ea typeface="Consolas" pitchFamily="34" charset="-122"/>
-                <a:cs typeface="Consolas" pitchFamily="34" charset="-120"/>
-              </a:rPr>
-              <a:t>genai</a:t>
-            </a:r>
-            <a:endParaRPr lang="en-US" sz="950" dirty="0"/>
-          </a:p>
-        </p:txBody>
-      </p:sp>
-      <p:sp>
-        <p:nvSpPr>
-          <p:cNvPr id="29" name="Text 27"/>
-          <p:cNvSpPr/>
-          <p:nvPr/>
-        </p:nvSpPr>
-        <p:spPr>
-          <a:xfrm>
-            <a:off x="6042991" y="1926999"/>
-            <a:ext cx="5577840" cy="228600"/>
-          </a:xfrm>
-          <a:prstGeom prst="rect">
-            <a:avLst/>
-          </a:prstGeom>
-          <a:noFill/>
-          <a:ln/>
-        </p:spPr>
-        <p:txBody>
-          <a:bodyPr wrap="square" lIns="0" tIns="0" rIns="0" bIns="0" rtlCol="0" anchor="ctr"/>
-          <a:lstStyle/>
-          <a:p>
-            <a:pPr marL="0" indent="0">
-              <a:buNone/>
-            </a:pPr>
-            <a:r>
-              <a:rPr lang="en-US" sz="950" dirty="0">
-                <a:solidFill>
-                  <a:srgbClr val="E6EDF3"/>
-                </a:solidFill>
-                <a:latin typeface="Consolas" pitchFamily="34" charset="0"/>
-                <a:ea typeface="Consolas" pitchFamily="34" charset="-122"/>
-                <a:cs typeface="Consolas" pitchFamily="34" charset="-120"/>
-              </a:rPr>
-              <a:t>from google.colab import userdata</a:t>
-            </a:r>
-            <a:endParaRPr lang="en-US" sz="950" dirty="0"/>
-          </a:p>
-        </p:txBody>
-      </p:sp>
-      <p:sp>
-        <p:nvSpPr>
-          <p:cNvPr id="30" name="Text 28"/>
-          <p:cNvSpPr/>
-          <p:nvPr/>
-        </p:nvSpPr>
-        <p:spPr>
-          <a:xfrm>
-            <a:off x="6062870" y="2422365"/>
-            <a:ext cx="5577840" cy="228600"/>
-          </a:xfrm>
-          <a:prstGeom prst="rect">
-            <a:avLst/>
-          </a:prstGeom>
-          <a:noFill/>
-          <a:ln/>
-        </p:spPr>
-        <p:txBody>
-          <a:bodyPr wrap="square" lIns="0" tIns="0" rIns="0" bIns="0" rtlCol="0" anchor="ctr"/>
-          <a:lstStyle/>
-          <a:p>
-            <a:pPr marL="0" indent="0">
-              <a:buNone/>
-            </a:pPr>
-            <a:r>
-              <a:rPr lang="en-US" sz="950" dirty="0">
-                <a:solidFill>
-                  <a:srgbClr val="E6EDF3"/>
-                </a:solidFill>
-                <a:latin typeface="Consolas" pitchFamily="34" charset="0"/>
-                <a:ea typeface="Consolas" pitchFamily="34" charset="-122"/>
-                <a:cs typeface="Consolas" pitchFamily="34" charset="-120"/>
-              </a:rPr>
-              <a:t>DEEPSEEK_API_KEY=userdata.get('DEEPSEEK_API_KEY')</a:t>
-            </a:r>
-            <a:endParaRPr lang="en-US" sz="950" dirty="0"/>
-          </a:p>
-        </p:txBody>
-      </p:sp>
-      <p:sp>
-        <p:nvSpPr>
-          <p:cNvPr id="36" name="Text 34"/>
-          <p:cNvSpPr/>
-          <p:nvPr/>
-        </p:nvSpPr>
-        <p:spPr>
-          <a:xfrm>
-            <a:off x="6172200" y="3913632"/>
-            <a:ext cx="5577840" cy="228600"/>
-          </a:xfrm>
-          <a:prstGeom prst="rect">
-            <a:avLst/>
-          </a:prstGeom>
-          <a:noFill/>
-          <a:ln/>
-        </p:spPr>
-        <p:txBody>
-          <a:bodyPr wrap="square" lIns="0" tIns="0" rIns="0" bIns="0" rtlCol="0" anchor="ctr"/>
-          <a:lstStyle/>
-          <a:p>
-            <a:pPr marL="0" indent="0">
-              <a:buNone/>
-            </a:pPr>
-            <a:endParaRPr lang="en-US" sz="950" dirty="0"/>
-          </a:p>
-        </p:txBody>
-      </p:sp>
-      <p:sp>
-        <p:nvSpPr>
-          <p:cNvPr id="37" name="Text 35"/>
-          <p:cNvSpPr/>
-          <p:nvPr/>
-        </p:nvSpPr>
-        <p:spPr>
-          <a:xfrm>
-            <a:off x="6192079" y="2878373"/>
-            <a:ext cx="5577840" cy="228600"/>
-          </a:xfrm>
-          <a:prstGeom prst="rect">
-            <a:avLst/>
-          </a:prstGeom>
-          <a:noFill/>
-          <a:ln/>
-        </p:spPr>
-        <p:txBody>
-          <a:bodyPr wrap="square" lIns="0" tIns="0" rIns="0" bIns="0" rtlCol="0" anchor="ctr"/>
-          <a:lstStyle/>
-          <a:p>
-            <a:pPr marL="0" indent="0">
-              <a:buNone/>
-            </a:pPr>
-            <a:r>
-              <a:rPr lang="en-US" sz="950" dirty="0">
-                <a:solidFill>
-                  <a:srgbClr val="F59E0B"/>
-                </a:solidFill>
-                <a:latin typeface="Consolas" pitchFamily="34" charset="0"/>
-                <a:ea typeface="Consolas" pitchFamily="34" charset="-122"/>
-                <a:cs typeface="Consolas" pitchFamily="34" charset="-120"/>
-              </a:rPr>
-              <a:t>MODEL = 'deepseek-chat'</a:t>
-            </a:r>
-            <a:endParaRPr lang="en-US" sz="950" dirty="0"/>
-          </a:p>
-        </p:txBody>
-      </p:sp>
-      <p:sp>
-        <p:nvSpPr>
-          <p:cNvPr id="38" name="Text 36"/>
-          <p:cNvSpPr/>
-          <p:nvPr/>
-        </p:nvSpPr>
-        <p:spPr>
-          <a:xfrm>
-            <a:off x="6162260" y="3254469"/>
-            <a:ext cx="5577840" cy="228600"/>
-          </a:xfrm>
-          <a:prstGeom prst="rect">
-            <a:avLst/>
-          </a:prstGeom>
-          <a:noFill/>
-          <a:ln/>
-        </p:spPr>
-        <p:txBody>
-          <a:bodyPr wrap="square" lIns="0" tIns="0" rIns="0" bIns="0" rtlCol="0" anchor="ctr"/>
-          <a:lstStyle/>
-          <a:p>
-            <a:r>
-              <a:rPr lang="en-US" sz="950" dirty="0">
-                <a:solidFill>
-                  <a:srgbClr val="E6EDF3"/>
-                </a:solidFill>
-                <a:latin typeface="Consolas" pitchFamily="34" charset="0"/>
-                <a:ea typeface="Consolas" pitchFamily="34" charset="-122"/>
-                <a:cs typeface="Consolas" pitchFamily="34" charset="-120"/>
-              </a:rPr>
-              <a:t>client =</a:t>
-            </a:r>
-            <a:r>
-              <a:rPr lang="en-US" sz="950" dirty="0" err="1">
-                <a:solidFill>
-                  <a:srgbClr val="E6EDF3"/>
-                </a:solidFill>
-                <a:latin typeface="Consolas" pitchFamily="34" charset="0"/>
-                <a:ea typeface="Consolas" pitchFamily="34" charset="-122"/>
-                <a:cs typeface="Consolas" pitchFamily="34" charset="-120"/>
-              </a:rPr>
-              <a:t>genai.Client</a:t>
-            </a:r>
-            <a:r>
-              <a:rPr lang="en-US" sz="950" dirty="0">
-                <a:solidFill>
-                  <a:srgbClr val="E6EDF3"/>
-                </a:solidFill>
-                <a:latin typeface="Consolas" pitchFamily="34" charset="0"/>
-                <a:ea typeface="Consolas" pitchFamily="34" charset="-122"/>
-                <a:cs typeface="Consolas" pitchFamily="34" charset="-120"/>
-              </a:rPr>
-              <a:t>(</a:t>
-            </a:r>
-            <a:r>
-              <a:rPr lang="en-US" sz="950" dirty="0" err="1">
-                <a:solidFill>
-                  <a:srgbClr val="E6EDF3"/>
-                </a:solidFill>
-                <a:latin typeface="Consolas" pitchFamily="34" charset="0"/>
-                <a:ea typeface="Consolas" pitchFamily="34" charset="-122"/>
-                <a:cs typeface="Consolas" pitchFamily="34" charset="-120"/>
-              </a:rPr>
-              <a:t>api_key</a:t>
-            </a:r>
-            <a:r>
-              <a:rPr lang="en-US" sz="950" dirty="0">
-                <a:solidFill>
-                  <a:srgbClr val="E6EDF3"/>
-                </a:solidFill>
-                <a:latin typeface="Consolas" pitchFamily="34" charset="0"/>
-                <a:ea typeface="Consolas" pitchFamily="34" charset="-122"/>
-                <a:cs typeface="Consolas" pitchFamily="34" charset="-120"/>
-              </a:rPr>
-              <a:t>=DEEPSEEK_API_KEY)</a:t>
-            </a:r>
-            <a:endParaRPr lang="en-US" sz="950" dirty="0"/>
-          </a:p>
-        </p:txBody>
-      </p:sp>
-      <p:sp>
-        <p:nvSpPr>
-          <p:cNvPr id="39" name="Text 37"/>
-          <p:cNvSpPr/>
-          <p:nvPr/>
-        </p:nvSpPr>
-        <p:spPr>
-          <a:xfrm>
-            <a:off x="6172200" y="4654296"/>
-            <a:ext cx="5577840" cy="228600"/>
-          </a:xfrm>
-          <a:prstGeom prst="rect">
-            <a:avLst/>
-          </a:prstGeom>
-          <a:noFill/>
-          <a:ln/>
-        </p:spPr>
-        <p:txBody>
-          <a:bodyPr wrap="square" lIns="0" tIns="0" rIns="0" bIns="0" rtlCol="0" anchor="ctr"/>
-          <a:lstStyle/>
-          <a:p>
-            <a:pPr marL="0" indent="0">
-              <a:buNone/>
-            </a:pPr>
-            <a:endParaRPr lang="en-US" sz="950" dirty="0"/>
-          </a:p>
-        </p:txBody>
-      </p:sp>
-      <p:sp>
-        <p:nvSpPr>
-          <p:cNvPr id="40" name="Text 38"/>
-          <p:cNvSpPr/>
-          <p:nvPr/>
-        </p:nvSpPr>
-        <p:spPr>
-          <a:xfrm>
-            <a:off x="6172200" y="3569342"/>
-            <a:ext cx="5577840" cy="228600"/>
-          </a:xfrm>
-          <a:prstGeom prst="rect">
-            <a:avLst/>
-          </a:prstGeom>
-          <a:noFill/>
-          <a:ln/>
-        </p:spPr>
-        <p:txBody>
-          <a:bodyPr wrap="square" lIns="0" tIns="0" rIns="0" bIns="0" rtlCol="0" anchor="ctr"/>
-          <a:lstStyle/>
-          <a:p>
-            <a:pPr marL="0" indent="0">
-              <a:buNone/>
-            </a:pPr>
-            <a:r>
-              <a:rPr lang="en-US" sz="950" dirty="0">
-                <a:solidFill>
-                  <a:srgbClr val="8B949E"/>
-                </a:solidFill>
-                <a:latin typeface="Consolas" pitchFamily="34" charset="0"/>
-                <a:ea typeface="Consolas" pitchFamily="34" charset="-122"/>
-                <a:cs typeface="Consolas" pitchFamily="34" charset="-120"/>
-              </a:rPr>
-              <a:t># Cell 4: ask() 헬퍼 함수</a:t>
-            </a:r>
-            <a:endParaRPr lang="en-US" sz="950" dirty="0"/>
-          </a:p>
-        </p:txBody>
-      </p:sp>
-      <p:sp>
-        <p:nvSpPr>
-          <p:cNvPr id="41" name="Text 39"/>
-          <p:cNvSpPr/>
-          <p:nvPr/>
-        </p:nvSpPr>
-        <p:spPr>
-          <a:xfrm>
-            <a:off x="6172200" y="3816230"/>
-            <a:ext cx="5577840" cy="228600"/>
-          </a:xfrm>
-          <a:prstGeom prst="rect">
-            <a:avLst/>
-          </a:prstGeom>
-          <a:noFill/>
-          <a:ln/>
-        </p:spPr>
-        <p:txBody>
-          <a:bodyPr wrap="square" lIns="0" tIns="0" rIns="0" bIns="0" rtlCol="0" anchor="ctr"/>
-          <a:lstStyle/>
-          <a:p>
-            <a:pPr marL="0" indent="0">
-              <a:buNone/>
-            </a:pPr>
-            <a:r>
-              <a:rPr lang="en-US" sz="950" dirty="0">
-                <a:solidFill>
-                  <a:srgbClr val="E6EDF3"/>
-                </a:solidFill>
-                <a:latin typeface="Consolas" pitchFamily="34" charset="0"/>
-                <a:ea typeface="Consolas" pitchFamily="34" charset="-122"/>
-                <a:cs typeface="Consolas" pitchFamily="34" charset="-120"/>
+          </a:p>
+          <a:p>
+            <a:r>
+              <a:rPr sz="1000">
+                <a:solidFill>
+                  <a:srgbClr val="C7D2FE"/>
+                </a:solidFill>
+                <a:latin typeface="Consolas"/>
+              </a:rPr>
+              <a:t/>
+            </a:r>
+          </a:p>
+          <a:p>
+            <a:r>
+              <a:rPr sz="1000">
+                <a:solidFill>
+                  <a:srgbClr val="C7D2FE"/>
+                </a:solidFill>
+                <a:latin typeface="Consolas"/>
+              </a:rPr>
+              <a:t># Cell 4: ask() 헬퍼</a:t>
+            </a:r>
+          </a:p>
+          <a:p>
+            <a:r>
+              <a:rPr sz="1000">
+                <a:solidFill>
+                  <a:srgbClr val="C7D2FE"/>
+                </a:solidFill>
+                <a:latin typeface="Consolas"/>
               </a:rPr>
               <a:t>def ask(prompt, system=None):</a:t>
             </a:r>
-            <a:endParaRPr lang="en-US" sz="950" dirty="0"/>
-          </a:p>
-        </p:txBody>
-      </p:sp>
-      <p:sp>
-        <p:nvSpPr>
-          <p:cNvPr id="42" name="Text 40"/>
-          <p:cNvSpPr/>
-          <p:nvPr/>
-        </p:nvSpPr>
-        <p:spPr>
-          <a:xfrm>
-            <a:off x="6172200" y="4063118"/>
-            <a:ext cx="5577840" cy="228600"/>
-          </a:xfrm>
-          <a:prstGeom prst="rect">
-            <a:avLst/>
-          </a:prstGeom>
-          <a:noFill/>
-          <a:ln/>
-        </p:spPr>
-        <p:txBody>
-          <a:bodyPr wrap="square" lIns="0" tIns="0" rIns="0" bIns="0" rtlCol="0" anchor="ctr"/>
-          <a:lstStyle/>
-          <a:p>
-            <a:pPr marL="0" indent="0">
-              <a:buNone/>
-            </a:pPr>
-            <a:r>
-              <a:rPr lang="en-US" sz="950" dirty="0">
-                <a:solidFill>
-                  <a:srgbClr val="E6EDF3"/>
-                </a:solidFill>
-                <a:latin typeface="Consolas" pitchFamily="34" charset="0"/>
-                <a:ea typeface="Consolas" pitchFamily="34" charset="-122"/>
-                <a:cs typeface="Consolas" pitchFamily="34" charset="-120"/>
-              </a:rPr>
-              <a:t>from google.genai import types</a:t>
-            </a:r>
-            <a:endParaRPr lang="en-US" sz="950" dirty="0"/>
-          </a:p>
-        </p:txBody>
-      </p:sp>
-      <p:sp>
-        <p:nvSpPr>
-          <p:cNvPr id="43" name="Text 41"/>
-          <p:cNvSpPr/>
-          <p:nvPr/>
-        </p:nvSpPr>
-        <p:spPr>
-          <a:xfrm>
-            <a:off x="6172200" y="4310006"/>
-            <a:ext cx="5577840" cy="228600"/>
-          </a:xfrm>
-          <a:prstGeom prst="rect">
-            <a:avLst/>
-          </a:prstGeom>
-          <a:noFill/>
-          <a:ln/>
-        </p:spPr>
-        <p:txBody>
-          <a:bodyPr wrap="square" lIns="0" tIns="0" rIns="0" bIns="0" rtlCol="0" anchor="ctr"/>
-          <a:lstStyle/>
-          <a:p>
-            <a:pPr marL="0" indent="0">
-              <a:buNone/>
-            </a:pPr>
-            <a:r>
-              <a:rPr lang="en-US" sz="950" dirty="0">
-                <a:solidFill>
-                  <a:srgbClr val="E6EDF3"/>
-                </a:solidFill>
-                <a:latin typeface="Consolas" pitchFamily="34" charset="0"/>
-                <a:ea typeface="Consolas" pitchFamily="34" charset="-122"/>
-                <a:cs typeface="Consolas" pitchFamily="34" charset="-120"/>
-              </a:rPr>
-              <a:t>config = types.GenerateContentConfig(</a:t>
-            </a:r>
-            <a:endParaRPr lang="en-US" sz="950" dirty="0"/>
-          </a:p>
-        </p:txBody>
-      </p:sp>
-      <p:sp>
-        <p:nvSpPr>
-          <p:cNvPr id="44" name="Text 42"/>
-          <p:cNvSpPr/>
-          <p:nvPr/>
-        </p:nvSpPr>
-        <p:spPr>
-          <a:xfrm>
-            <a:off x="6172200" y="4556894"/>
-            <a:ext cx="5577840" cy="228600"/>
-          </a:xfrm>
-          <a:prstGeom prst="rect">
-            <a:avLst/>
-          </a:prstGeom>
-          <a:noFill/>
-          <a:ln/>
-        </p:spPr>
-        <p:txBody>
-          <a:bodyPr wrap="square" lIns="0" tIns="0" rIns="0" bIns="0" rtlCol="0" anchor="ctr"/>
-          <a:lstStyle/>
-          <a:p>
-            <a:pPr marL="0" indent="0">
-              <a:buNone/>
-            </a:pPr>
-            <a:r>
-              <a:rPr lang="en-US" sz="950" dirty="0">
-                <a:solidFill>
-                  <a:srgbClr val="E6EDF3"/>
-                </a:solidFill>
-                <a:latin typeface="Consolas" pitchFamily="34" charset="0"/>
-                <a:ea typeface="Consolas" pitchFamily="34" charset="-122"/>
-                <a:cs typeface="Consolas" pitchFamily="34" charset="-120"/>
-              </a:rPr>
-              <a:t>system_instruction=system) if system else None</a:t>
-            </a:r>
-            <a:endParaRPr lang="en-US" sz="950" dirty="0"/>
-          </a:p>
-        </p:txBody>
-      </p:sp>
-      <p:sp>
-        <p:nvSpPr>
-          <p:cNvPr id="45" name="Text 43"/>
-          <p:cNvSpPr/>
-          <p:nvPr/>
-        </p:nvSpPr>
-        <p:spPr>
-          <a:xfrm>
-            <a:off x="6172200" y="4803782"/>
-            <a:ext cx="5577840" cy="228600"/>
-          </a:xfrm>
-          <a:prstGeom prst="rect">
-            <a:avLst/>
-          </a:prstGeom>
-          <a:noFill/>
-          <a:ln/>
-        </p:spPr>
-        <p:txBody>
-          <a:bodyPr wrap="square" lIns="0" tIns="0" rIns="0" bIns="0" rtlCol="0" anchor="ctr"/>
-          <a:lstStyle/>
-          <a:p>
-            <a:pPr marL="0" indent="0">
-              <a:buNone/>
-            </a:pPr>
-            <a:r>
-              <a:rPr lang="en-US" sz="950" dirty="0">
-                <a:solidFill>
-                  <a:srgbClr val="E6EDF3"/>
-                </a:solidFill>
-                <a:latin typeface="Consolas" pitchFamily="34" charset="0"/>
-                <a:ea typeface="Consolas" pitchFamily="34" charset="-122"/>
-                <a:cs typeface="Consolas" pitchFamily="34" charset="-120"/>
-              </a:rPr>
-              <a:t>return client.models.generate_content(</a:t>
-            </a:r>
-            <a:endParaRPr lang="en-US" sz="950" dirty="0"/>
-          </a:p>
-        </p:txBody>
-      </p:sp>
-      <p:sp>
-        <p:nvSpPr>
-          <p:cNvPr id="46" name="Text 44"/>
-          <p:cNvSpPr/>
-          <p:nvPr/>
-        </p:nvSpPr>
-        <p:spPr>
-          <a:xfrm>
-            <a:off x="6172200" y="5050670"/>
-            <a:ext cx="5577840" cy="228600"/>
-          </a:xfrm>
-          <a:prstGeom prst="rect">
-            <a:avLst/>
-          </a:prstGeom>
-          <a:noFill/>
-          <a:ln/>
-        </p:spPr>
-        <p:txBody>
-          <a:bodyPr wrap="square" lIns="0" tIns="0" rIns="0" bIns="0" rtlCol="0" anchor="ctr"/>
-          <a:lstStyle/>
-          <a:p>
-            <a:pPr marL="0" indent="0">
-              <a:buNone/>
-            </a:pPr>
-            <a:r>
-              <a:rPr lang="en-US" sz="950" dirty="0">
-                <a:solidFill>
-                  <a:srgbClr val="E6EDF3"/>
-                </a:solidFill>
-                <a:latin typeface="Consolas" pitchFamily="34" charset="0"/>
-                <a:ea typeface="Consolas" pitchFamily="34" charset="-122"/>
-                <a:cs typeface="Consolas" pitchFamily="34" charset="-120"/>
-              </a:rPr>
-              <a:t>model=MODEL, contents=prompt,</a:t>
-            </a:r>
-            <a:endParaRPr lang="en-US" sz="950" dirty="0"/>
-          </a:p>
-        </p:txBody>
-      </p:sp>
-      <p:sp>
-        <p:nvSpPr>
-          <p:cNvPr id="50" name="Text 48"/>
-          <p:cNvSpPr/>
-          <p:nvPr/>
-        </p:nvSpPr>
-        <p:spPr>
-          <a:xfrm>
-            <a:off x="11064240" y="6053328"/>
-            <a:ext cx="914400" cy="274320"/>
-          </a:xfrm>
-          <a:prstGeom prst="rect">
-            <a:avLst/>
-          </a:prstGeom>
-          <a:noFill/>
-          <a:ln/>
-        </p:spPr>
-        <p:txBody>
-          <a:bodyPr wrap="square" lIns="0" tIns="0" rIns="0" bIns="0" rtlCol="0" anchor="ctr"/>
-          <a:lstStyle/>
-          <a:p>
-            <a:pPr marL="0" indent="0" algn="r">
-              <a:buNone/>
-            </a:pPr>
-            <a:r>
-              <a:rPr lang="en-US" sz="900" dirty="0">
-                <a:solidFill>
-                  <a:srgbClr val="94A3B8"/>
-                </a:solidFill>
-                <a:latin typeface="Arial" pitchFamily="34" charset="0"/>
-                <a:ea typeface="Arial" pitchFamily="34" charset="-122"/>
-                <a:cs typeface="Arial" pitchFamily="34" charset="-120"/>
-              </a:rPr>
-              <a:t>3 / 16</a:t>
-            </a:r>
-            <a:endParaRPr lang="en-US" sz="900" dirty="0"/>
+          </a:p>
+          <a:p>
+            <a:r>
+              <a:rPr sz="1000">
+                <a:solidFill>
+                  <a:srgbClr val="C7D2FE"/>
+                </a:solidFill>
+                <a:latin typeface="Consolas"/>
+              </a:rPr>
+              <a:t>    messages = []</a:t>
+            </a:r>
+          </a:p>
+          <a:p>
+            <a:r>
+              <a:rPr sz="1000">
+                <a:solidFill>
+                  <a:srgbClr val="C7D2FE"/>
+                </a:solidFill>
+                <a:latin typeface="Consolas"/>
+              </a:rPr>
+              <a:t>    if system:</a:t>
+            </a:r>
+          </a:p>
+          <a:p>
+            <a:r>
+              <a:rPr sz="1000">
+                <a:solidFill>
+                  <a:srgbClr val="C7D2FE"/>
+                </a:solidFill>
+                <a:latin typeface="Consolas"/>
+              </a:rPr>
+              <a:t>        messages.append({"role":"system",</a:t>
+            </a:r>
+          </a:p>
+          <a:p>
+            <a:r>
+              <a:rPr sz="1000">
+                <a:solidFill>
+                  <a:srgbClr val="C7D2FE"/>
+                </a:solidFill>
+                <a:latin typeface="Consolas"/>
+              </a:rPr>
+              <a:t>                         "content": system})</a:t>
+            </a:r>
+          </a:p>
+          <a:p>
+            <a:r>
+              <a:rPr sz="1000">
+                <a:solidFill>
+                  <a:srgbClr val="C7D2FE"/>
+                </a:solidFill>
+                <a:latin typeface="Consolas"/>
+              </a:rPr>
+              <a:t>    messages.append({"role":"user",</a:t>
+            </a:r>
+          </a:p>
+          <a:p>
+            <a:r>
+              <a:rPr sz="1000">
+                <a:solidFill>
+                  <a:srgbClr val="C7D2FE"/>
+                </a:solidFill>
+                <a:latin typeface="Consolas"/>
+              </a:rPr>
+              <a:t>                     "content": prompt})</a:t>
+            </a:r>
+          </a:p>
+          <a:p>
+            <a:r>
+              <a:rPr sz="1000">
+                <a:solidFill>
+                  <a:srgbClr val="C7D2FE"/>
+                </a:solidFill>
+                <a:latin typeface="Consolas"/>
+              </a:rPr>
+              <a:t>    return client.chat.completions.create(</a:t>
+            </a:r>
+          </a:p>
+          <a:p>
+            <a:r>
+              <a:rPr sz="1000">
+                <a:solidFill>
+                  <a:srgbClr val="C7D2FE"/>
+                </a:solidFill>
+                <a:latin typeface="Consolas"/>
+              </a:rPr>
+              <a:t>        model=MODEL, messages=messages,</a:t>
+            </a:r>
+          </a:p>
+          <a:p>
+            <a:r>
+              <a:rPr sz="1000">
+                <a:solidFill>
+                  <a:srgbClr val="C7D2FE"/>
+                </a:solidFill>
+                <a:latin typeface="Consolas"/>
+              </a:rPr>
+              <a:t>    ).choices[0].message.content</a:t>
+            </a:r>
           </a:p>
         </p:txBody>
       </p:sp>
